--- a/final project w2.pptx
+++ b/final project w2.pptx
@@ -760,7 +760,7 @@
               </a:spcAft>
               <a:buNone/>
             </a:pPr>
-            <a:endParaRPr/>
+            <a:endParaRPr dirty="0"/>
           </a:p>
         </p:txBody>
       </p:sp>
@@ -776,8 +776,8 @@
         </p:nvSpPr>
         <p:spPr>
           <a:xfrm>
-            <a:off x="1143225" y="685800"/>
-            <a:ext cx="4572225" cy="3429000"/>
+            <a:off x="381000" y="685800"/>
+            <a:ext cx="6096000" cy="3429000"/>
           </a:xfrm>
           <a:custGeom>
             <a:avLst/>
@@ -880,8 +880,8 @@
         </p:nvSpPr>
         <p:spPr>
           <a:xfrm>
-            <a:off x="1143225" y="685800"/>
-            <a:ext cx="4572225" cy="3429000"/>
+            <a:off x="381000" y="685800"/>
+            <a:ext cx="6096000" cy="3429000"/>
           </a:xfrm>
           <a:custGeom>
             <a:avLst/>
@@ -984,8 +984,8 @@
         </p:nvSpPr>
         <p:spPr>
           <a:xfrm>
-            <a:off x="1143225" y="685800"/>
-            <a:ext cx="4572300" cy="3429000"/>
+            <a:off x="381000" y="685800"/>
+            <a:ext cx="6096000" cy="3429000"/>
           </a:xfrm>
           <a:custGeom>
             <a:avLst/>
@@ -1088,8 +1088,8 @@
         </p:nvSpPr>
         <p:spPr>
           <a:xfrm>
-            <a:off x="1143225" y="685800"/>
-            <a:ext cx="4572300" cy="3429000"/>
+            <a:off x="381000" y="685800"/>
+            <a:ext cx="6096000" cy="3429000"/>
           </a:xfrm>
           <a:custGeom>
             <a:avLst/>
@@ -16325,7 +16325,7 @@
               <a:buNone/>
             </a:pPr>
             <a:r>
-              <a:rPr lang="en" sz="1800" b="1">
+              <a:rPr lang="en" sz="1800" b="1" dirty="0">
                 <a:latin typeface="Calibri"/>
                 <a:ea typeface="Calibri"/>
                 <a:cs typeface="Calibri"/>
@@ -16333,7 +16333,7 @@
               </a:rPr>
               <a:t>Songyi Huang,  Jiayu Zhao,  Yicheng Liu</a:t>
             </a:r>
-            <a:endParaRPr sz="1800" b="1">
+            <a:endParaRPr sz="1800" b="1" dirty="0">
               <a:latin typeface="Calibri"/>
               <a:ea typeface="Calibri"/>
               <a:cs typeface="Calibri"/>
@@ -16539,7 +16539,7 @@
         <p:spPr>
           <a:xfrm>
             <a:off x="182880" y="4887468"/>
-            <a:ext cx="6400800" cy="256032"/>
+            <a:ext cx="6400800" cy="230792"/>
           </a:xfrm>
           <a:prstGeom prst="rect">
             <a:avLst/>
@@ -16555,17 +16555,9 @@
           </a:bodyPr>
           <a:lstStyle/>
           <a:p>
-            <a:pPr marL="0" marR="0" lvl="0" indent="0" algn="l" rtl="0">
-              <a:spcBef>
-                <a:spcPts val="0"/>
-              </a:spcBef>
-              <a:spcAft>
-                <a:spcPts val="0"/>
-              </a:spcAft>
-              <a:buNone/>
-            </a:pPr>
+            <a:pPr lvl="0"/>
             <a:r>
-              <a:rPr lang="en" sz="900" b="0" i="0" u="none" strike="noStrike" cap="none">
+              <a:rPr lang="en-US" sz="900" dirty="0">
                 <a:solidFill>
                   <a:srgbClr val="FFFFFF"/>
                 </a:solidFill>
@@ -16574,9 +16566,9 @@
                 <a:cs typeface="Calibri"/>
                 <a:sym typeface="Calibri"/>
               </a:rPr>
-              <a:t>Oligarchic Versus Democratic Societies</a:t>
+              <a:t>Data Analytics and Visualization for PublicPolicy</a:t>
             </a:r>
-            <a:endParaRPr/>
+            <a:endParaRPr dirty="0"/>
           </a:p>
         </p:txBody>
       </p:sp>
@@ -16589,7 +16581,7 @@
         <p:spPr>
           <a:xfrm>
             <a:off x="6583680" y="4887468"/>
-            <a:ext cx="2377440" cy="256032"/>
+            <a:ext cx="2377440" cy="446236"/>
           </a:xfrm>
           <a:prstGeom prst="rect">
             <a:avLst/>
@@ -16615,7 +16607,7 @@
               <a:buNone/>
             </a:pPr>
             <a:r>
-              <a:rPr lang="en" sz="900" b="0" i="0" u="none" strike="noStrike" cap="none">
+              <a:rPr lang="en" sz="900" b="0" i="0" u="none" strike="noStrike" cap="none" dirty="0">
                 <a:solidFill>
                   <a:srgbClr val="FFFFFF"/>
                 </a:solidFill>
@@ -16624,9 +16616,32 @@
                 <a:cs typeface="Calibri"/>
                 <a:sym typeface="Calibri"/>
               </a:rPr>
-              <a:t>1 / 26</a:t>
+              <a:t>1 / </a:t>
             </a:r>
-            <a:endParaRPr/>
+            <a:r>
+              <a:rPr lang="en" sz="900" dirty="0">
+                <a:solidFill>
+                  <a:srgbClr val="FFFFFF"/>
+                </a:solidFill>
+                <a:latin typeface="Calibri"/>
+                <a:ea typeface="Calibri"/>
+                <a:cs typeface="Calibri"/>
+                <a:sym typeface="Calibri"/>
+              </a:rPr>
+              <a:t>8</a:t>
+            </a:r>
+          </a:p>
+          <a:p>
+            <a:pPr marL="0" marR="0" lvl="0" indent="0" algn="r" rtl="0">
+              <a:spcBef>
+                <a:spcPts val="0"/>
+              </a:spcBef>
+              <a:spcAft>
+                <a:spcPts val="0"/>
+              </a:spcAft>
+              <a:buNone/>
+            </a:pPr>
+            <a:endParaRPr dirty="0"/>
           </a:p>
         </p:txBody>
       </p:sp>
@@ -16824,7 +16839,7 @@
         <p:spPr>
           <a:xfrm>
             <a:off x="365700" y="839276"/>
-            <a:ext cx="8412600" cy="4278900"/>
+            <a:ext cx="8412600" cy="4381928"/>
           </a:xfrm>
           <a:prstGeom prst="rect">
             <a:avLst/>
@@ -16850,24 +16865,24 @@
               <a:buNone/>
             </a:pPr>
             <a:r>
-              <a:rPr lang="en" sz="1450" b="1">
-                <a:latin typeface="Calibri"/>
+              <a:rPr lang="en" sz="1450" b="1" dirty="0">
+                <a:latin typeface="Times New Roman" panose="02020603050405020304" pitchFamily="18" charset="0"/>
                 <a:ea typeface="Calibri"/>
-                <a:cs typeface="Calibri"/>
+                <a:cs typeface="Times New Roman" panose="02020603050405020304" pitchFamily="18" charset="0"/>
                 <a:sym typeface="Calibri"/>
               </a:rPr>
               <a:t>Motivation</a:t>
             </a:r>
-            <a:endParaRPr sz="900" b="1">
+            <a:endParaRPr sz="900" b="1" dirty="0">
               <a:solidFill>
                 <a:srgbClr val="000080"/>
               </a:solidFill>
               <a:highlight>
                 <a:srgbClr val="FFFFFF"/>
               </a:highlight>
-              <a:latin typeface="Courier New"/>
+              <a:latin typeface="Times New Roman" panose="02020603050405020304" pitchFamily="18" charset="0"/>
               <a:ea typeface="Courier New"/>
-              <a:cs typeface="Courier New"/>
+              <a:cs typeface="Times New Roman" panose="02020603050405020304" pitchFamily="18" charset="0"/>
               <a:sym typeface="Courier New"/>
             </a:endParaRPr>
           </a:p>
@@ -16881,7 +16896,236 @@
               </a:spcAft>
               <a:buNone/>
             </a:pPr>
-            <a:endParaRPr sz="1450" b="1">
+            <a:endParaRPr sz="1450" b="1" dirty="0">
+              <a:latin typeface="Times New Roman" panose="02020603050405020304" pitchFamily="18" charset="0"/>
+              <a:ea typeface="Calibri"/>
+              <a:cs typeface="Times New Roman" panose="02020603050405020304" pitchFamily="18" charset="0"/>
+              <a:sym typeface="Calibri"/>
+            </a:endParaRPr>
+          </a:p>
+          <a:p>
+            <a:pPr marL="0" lvl="0" indent="0" algn="l" rtl="0">
+              <a:lnSpc>
+                <a:spcPct val="150000"/>
+              </a:lnSpc>
+              <a:spcBef>
+                <a:spcPts val="0"/>
+              </a:spcBef>
+              <a:spcAft>
+                <a:spcPts val="0"/>
+              </a:spcAft>
+              <a:buClr>
+                <a:schemeClr val="dk1"/>
+              </a:buClr>
+              <a:buSzPts val="1100"/>
+              <a:buFont typeface="Arial"/>
+              <a:buNone/>
+            </a:pPr>
+            <a:r>
+              <a:rPr lang="en" sz="1350" dirty="0">
+                <a:latin typeface="Times New Roman" panose="02020603050405020304" pitchFamily="18" charset="0"/>
+                <a:ea typeface="Calibri"/>
+                <a:cs typeface="Times New Roman" panose="02020603050405020304" pitchFamily="18" charset="0"/>
+                <a:sym typeface="Calibri"/>
+              </a:rPr>
+              <a:t>Financial regulators such as the SEC, FDIC, and the Federal Reserve closely monitor market stability, yet it remains difficult to measure how quickly and intensely financial markets react to regulatory announcements and news events</a:t>
+            </a:r>
+            <a:r>
+              <a:rPr lang="en" sz="900" dirty="0">
+                <a:solidFill>
+                  <a:srgbClr val="3B3B3B"/>
+                </a:solidFill>
+                <a:highlight>
+                  <a:srgbClr val="FFFFFF"/>
+                </a:highlight>
+                <a:latin typeface="Times New Roman" panose="02020603050405020304" pitchFamily="18" charset="0"/>
+                <a:ea typeface="Courier New"/>
+                <a:cs typeface="Times New Roman" panose="02020603050405020304" pitchFamily="18" charset="0"/>
+                <a:sym typeface="Courier New"/>
+              </a:rPr>
+              <a:t>.</a:t>
+            </a:r>
+            <a:endParaRPr sz="900" dirty="0">
+              <a:solidFill>
+                <a:srgbClr val="3B3B3B"/>
+              </a:solidFill>
+              <a:highlight>
+                <a:srgbClr val="FFFFFF"/>
+              </a:highlight>
+              <a:latin typeface="Times New Roman" panose="02020603050405020304" pitchFamily="18" charset="0"/>
+              <a:ea typeface="Courier New"/>
+              <a:cs typeface="Times New Roman" panose="02020603050405020304" pitchFamily="18" charset="0"/>
+              <a:sym typeface="Courier New"/>
+            </a:endParaRPr>
+          </a:p>
+          <a:p>
+            <a:pPr marL="0" marR="0" lvl="0" indent="0" algn="l" rtl="0">
+              <a:spcBef>
+                <a:spcPts val="0"/>
+              </a:spcBef>
+              <a:spcAft>
+                <a:spcPts val="0"/>
+              </a:spcAft>
+              <a:buNone/>
+            </a:pPr>
+            <a:endParaRPr sz="1350" b="0" i="0" u="none" strike="noStrike" cap="none" dirty="0">
+              <a:solidFill>
+                <a:srgbClr val="000000"/>
+              </a:solidFill>
+              <a:latin typeface="Times New Roman" panose="02020603050405020304" pitchFamily="18" charset="0"/>
+              <a:ea typeface="Calibri"/>
+              <a:cs typeface="Times New Roman" panose="02020603050405020304" pitchFamily="18" charset="0"/>
+              <a:sym typeface="Calibri"/>
+            </a:endParaRPr>
+          </a:p>
+          <a:p>
+            <a:pPr marL="0" marR="0" lvl="0" indent="0" algn="l" rtl="0">
+              <a:spcBef>
+                <a:spcPts val="0"/>
+              </a:spcBef>
+              <a:spcAft>
+                <a:spcPts val="0"/>
+              </a:spcAft>
+              <a:buNone/>
+            </a:pPr>
+            <a:r>
+              <a:rPr lang="en" sz="1350" b="1" dirty="0">
+                <a:latin typeface="Times New Roman" panose="02020603050405020304" pitchFamily="18" charset="0"/>
+                <a:ea typeface="Calibri"/>
+                <a:cs typeface="Times New Roman" panose="02020603050405020304" pitchFamily="18" charset="0"/>
+                <a:sym typeface="Calibri"/>
+              </a:rPr>
+              <a:t>We ask 3 Questions</a:t>
+            </a:r>
+            <a:endParaRPr sz="1350" b="1" dirty="0">
+              <a:latin typeface="Times New Roman" panose="02020603050405020304" pitchFamily="18" charset="0"/>
+              <a:ea typeface="Calibri"/>
+              <a:cs typeface="Times New Roman" panose="02020603050405020304" pitchFamily="18" charset="0"/>
+              <a:sym typeface="Calibri"/>
+            </a:endParaRPr>
+          </a:p>
+          <a:p>
+            <a:pPr marL="0" marR="0" lvl="0" indent="0" algn="l" rtl="0">
+              <a:spcBef>
+                <a:spcPts val="0"/>
+              </a:spcBef>
+              <a:spcAft>
+                <a:spcPts val="0"/>
+              </a:spcAft>
+              <a:buNone/>
+            </a:pPr>
+            <a:endParaRPr sz="1350" dirty="0">
+              <a:latin typeface="Times New Roman" panose="02020603050405020304" pitchFamily="18" charset="0"/>
+              <a:ea typeface="Calibri"/>
+              <a:cs typeface="Times New Roman" panose="02020603050405020304" pitchFamily="18" charset="0"/>
+              <a:sym typeface="Calibri"/>
+            </a:endParaRPr>
+          </a:p>
+          <a:p>
+            <a:pPr marL="0" marR="0" lvl="0" indent="0" algn="l" rtl="0">
+              <a:spcBef>
+                <a:spcPts val="0"/>
+              </a:spcBef>
+              <a:spcAft>
+                <a:spcPts val="0"/>
+              </a:spcAft>
+              <a:buNone/>
+            </a:pPr>
+            <a:r>
+              <a:rPr lang="en" sz="1350" dirty="0">
+                <a:latin typeface="Times New Roman" panose="02020603050405020304" pitchFamily="18" charset="0"/>
+                <a:ea typeface="Calibri"/>
+                <a:cs typeface="Times New Roman" panose="02020603050405020304" pitchFamily="18" charset="0"/>
+                <a:sym typeface="Calibri"/>
+              </a:rPr>
+              <a:t>1. Can sentiment scores derived from Large Language Models (LLMs) applied to financial news predict short-term volatility in regional bank stocks?</a:t>
+            </a:r>
+            <a:endParaRPr sz="1350" dirty="0">
+              <a:latin typeface="Times New Roman" panose="02020603050405020304" pitchFamily="18" charset="0"/>
+              <a:ea typeface="Calibri"/>
+              <a:cs typeface="Times New Roman" panose="02020603050405020304" pitchFamily="18" charset="0"/>
+              <a:sym typeface="Calibri"/>
+            </a:endParaRPr>
+          </a:p>
+          <a:p>
+            <a:pPr marL="0" lvl="0" indent="0" algn="l" rtl="0">
+              <a:lnSpc>
+                <a:spcPct val="150000"/>
+              </a:lnSpc>
+              <a:spcBef>
+                <a:spcPts val="0"/>
+              </a:spcBef>
+              <a:spcAft>
+                <a:spcPts val="0"/>
+              </a:spcAft>
+              <a:buClr>
+                <a:schemeClr val="dk1"/>
+              </a:buClr>
+              <a:buSzPts val="1100"/>
+              <a:buFont typeface="Arial"/>
+              <a:buNone/>
+            </a:pPr>
+            <a:r>
+              <a:rPr lang="en" sz="1350" dirty="0">
+                <a:latin typeface="Times New Roman" panose="02020603050405020304" pitchFamily="18" charset="0"/>
+                <a:ea typeface="Calibri"/>
+                <a:cs typeface="Times New Roman" panose="02020603050405020304" pitchFamily="18" charset="0"/>
+                <a:sym typeface="Calibri"/>
+              </a:rPr>
+              <a:t>2. Do LLM-based sentiment indicators provide earlier or stronger signals of market instability than traditional market metrics such as historical volatility or trading volume?</a:t>
+            </a:r>
+            <a:endParaRPr sz="1350" dirty="0">
+              <a:latin typeface="Times New Roman" panose="02020603050405020304" pitchFamily="18" charset="0"/>
+              <a:ea typeface="Calibri"/>
+              <a:cs typeface="Times New Roman" panose="02020603050405020304" pitchFamily="18" charset="0"/>
+              <a:sym typeface="Calibri"/>
+            </a:endParaRPr>
+          </a:p>
+          <a:p>
+            <a:pPr marL="0" lvl="0" indent="0" algn="l" rtl="0">
+              <a:lnSpc>
+                <a:spcPct val="150000"/>
+              </a:lnSpc>
+              <a:spcBef>
+                <a:spcPts val="0"/>
+              </a:spcBef>
+              <a:spcAft>
+                <a:spcPts val="0"/>
+              </a:spcAft>
+              <a:buSzPts val="1100"/>
+              <a:buNone/>
+            </a:pPr>
+            <a:r>
+              <a:rPr lang="en" sz="1350" dirty="0">
+                <a:latin typeface="Times New Roman" panose="02020603050405020304" pitchFamily="18" charset="0"/>
+                <a:ea typeface="Calibri"/>
+                <a:cs typeface="Times New Roman" panose="02020603050405020304" pitchFamily="18" charset="0"/>
+                <a:sym typeface="Calibri"/>
+              </a:rPr>
+              <a:t>3. Are market reactions to financial news and regulation geographically concentrated, affecting certain regions more than others?</a:t>
+            </a:r>
+            <a:endParaRPr sz="1350" dirty="0">
+              <a:latin typeface="Times New Roman" panose="02020603050405020304" pitchFamily="18" charset="0"/>
+              <a:ea typeface="Calibri"/>
+              <a:cs typeface="Times New Roman" panose="02020603050405020304" pitchFamily="18" charset="0"/>
+              <a:sym typeface="Calibri"/>
+            </a:endParaRPr>
+          </a:p>
+          <a:p>
+            <a:pPr marL="0" lvl="0" indent="0" algn="l" rtl="0">
+              <a:lnSpc>
+                <a:spcPct val="150000"/>
+              </a:lnSpc>
+              <a:spcBef>
+                <a:spcPts val="0"/>
+              </a:spcBef>
+              <a:spcAft>
+                <a:spcPts val="0"/>
+              </a:spcAft>
+              <a:buSzPts val="1100"/>
+              <a:buNone/>
+            </a:pPr>
+            <a:endParaRPr sz="1350" dirty="0">
               <a:latin typeface="Calibri"/>
               <a:ea typeface="Calibri"/>
               <a:cs typeface="Calibri"/>
@@ -16899,133 +17143,19 @@
               <a:spcAft>
                 <a:spcPts val="0"/>
               </a:spcAft>
-              <a:buClr>
-                <a:schemeClr val="dk1"/>
-              </a:buClr>
               <a:buSzPts val="1100"/>
-              <a:buFont typeface="Arial"/>
               <a:buNone/>
             </a:pPr>
             <a:r>
-              <a:rPr lang="en" sz="1350">
+              <a:rPr lang="en" sz="1350" b="1" dirty="0">
                 <a:latin typeface="Calibri"/>
                 <a:ea typeface="Calibri"/>
                 <a:cs typeface="Calibri"/>
                 <a:sym typeface="Calibri"/>
               </a:rPr>
-              <a:t>Financial regulators such as the SEC, FDIC, and the Federal Reserve closely monitor market stability, yet it remains difficult to measure how quickly and intensely financial markets react to regulatory announcements and news events</a:t>
+              <a:t>Figure out how AI-based text analysis could support financial stability monitoring and regulatory decision-making</a:t>
             </a:r>
-            <a:r>
-              <a:rPr lang="en" sz="900">
-                <a:solidFill>
-                  <a:srgbClr val="3B3B3B"/>
-                </a:solidFill>
-                <a:highlight>
-                  <a:srgbClr val="FFFFFF"/>
-                </a:highlight>
-                <a:latin typeface="Courier New"/>
-                <a:ea typeface="Courier New"/>
-                <a:cs typeface="Courier New"/>
-                <a:sym typeface="Courier New"/>
-              </a:rPr>
-              <a:t>.</a:t>
-            </a:r>
-            <a:endParaRPr sz="900">
-              <a:solidFill>
-                <a:srgbClr val="3B3B3B"/>
-              </a:solidFill>
-              <a:highlight>
-                <a:srgbClr val="FFFFFF"/>
-              </a:highlight>
-              <a:latin typeface="Courier New"/>
-              <a:ea typeface="Courier New"/>
-              <a:cs typeface="Courier New"/>
-              <a:sym typeface="Courier New"/>
-            </a:endParaRPr>
-          </a:p>
-          <a:p>
-            <a:pPr marL="0" marR="0" lvl="0" indent="0" algn="l" rtl="0">
-              <a:spcBef>
-                <a:spcPts val="0"/>
-              </a:spcBef>
-              <a:spcAft>
-                <a:spcPts val="0"/>
-              </a:spcAft>
-              <a:buNone/>
-            </a:pPr>
-            <a:endParaRPr sz="1350" b="0" i="0" u="none" strike="noStrike" cap="none">
-              <a:solidFill>
-                <a:srgbClr val="000000"/>
-              </a:solidFill>
-              <a:latin typeface="Calibri"/>
-              <a:ea typeface="Calibri"/>
-              <a:cs typeface="Calibri"/>
-              <a:sym typeface="Calibri"/>
-            </a:endParaRPr>
-          </a:p>
-          <a:p>
-            <a:pPr marL="0" marR="0" lvl="0" indent="0" algn="l" rtl="0">
-              <a:spcBef>
-                <a:spcPts val="0"/>
-              </a:spcBef>
-              <a:spcAft>
-                <a:spcPts val="0"/>
-              </a:spcAft>
-              <a:buNone/>
-            </a:pPr>
-            <a:r>
-              <a:rPr lang="en" sz="1350" b="1">
-                <a:latin typeface="Calibri"/>
-                <a:ea typeface="Calibri"/>
-                <a:cs typeface="Calibri"/>
-                <a:sym typeface="Calibri"/>
-              </a:rPr>
-              <a:t>We ask 3 Questions</a:t>
-            </a:r>
-            <a:endParaRPr sz="1350" b="1">
-              <a:latin typeface="Calibri"/>
-              <a:ea typeface="Calibri"/>
-              <a:cs typeface="Calibri"/>
-              <a:sym typeface="Calibri"/>
-            </a:endParaRPr>
-          </a:p>
-          <a:p>
-            <a:pPr marL="0" marR="0" lvl="0" indent="0" algn="l" rtl="0">
-              <a:spcBef>
-                <a:spcPts val="0"/>
-              </a:spcBef>
-              <a:spcAft>
-                <a:spcPts val="0"/>
-              </a:spcAft>
-              <a:buNone/>
-            </a:pPr>
-            <a:endParaRPr sz="1350">
-              <a:latin typeface="Calibri"/>
-              <a:ea typeface="Calibri"/>
-              <a:cs typeface="Calibri"/>
-              <a:sym typeface="Calibri"/>
-            </a:endParaRPr>
-          </a:p>
-          <a:p>
-            <a:pPr marL="0" marR="0" lvl="0" indent="0" algn="l" rtl="0">
-              <a:spcBef>
-                <a:spcPts val="0"/>
-              </a:spcBef>
-              <a:spcAft>
-                <a:spcPts val="0"/>
-              </a:spcAft>
-              <a:buNone/>
-            </a:pPr>
-            <a:r>
-              <a:rPr lang="en" sz="1350">
-                <a:latin typeface="Calibri"/>
-                <a:ea typeface="Calibri"/>
-                <a:cs typeface="Calibri"/>
-                <a:sym typeface="Calibri"/>
-              </a:rPr>
-              <a:t>1. Can sentiment scores derived from Large Language Models (LLMs) applied to financial news predict short-term volatility in regional bank stocks?</a:t>
-            </a:r>
-            <a:endParaRPr sz="1350">
+            <a:endParaRPr sz="1350" b="1" dirty="0">
               <a:latin typeface="Calibri"/>
               <a:ea typeface="Calibri"/>
               <a:cs typeface="Calibri"/>
@@ -17043,125 +17173,10 @@
               <a:spcAft>
                 <a:spcPts val="0"/>
               </a:spcAft>
-              <a:buClr>
-                <a:schemeClr val="dk1"/>
-              </a:buClr>
               <a:buSzPts val="1100"/>
-              <a:buFont typeface="Arial"/>
               <a:buNone/>
             </a:pPr>
-            <a:r>
-              <a:rPr lang="en" sz="1350">
-                <a:latin typeface="Calibri"/>
-                <a:ea typeface="Calibri"/>
-                <a:cs typeface="Calibri"/>
-                <a:sym typeface="Calibri"/>
-              </a:rPr>
-              <a:t>2. Do LLM-based sentiment indicators provide earlier or stronger signals of market instability than traditional market metrics such as historical volatility or trading volume?</a:t>
-            </a:r>
-            <a:endParaRPr sz="1350">
-              <a:latin typeface="Calibri"/>
-              <a:ea typeface="Calibri"/>
-              <a:cs typeface="Calibri"/>
-              <a:sym typeface="Calibri"/>
-            </a:endParaRPr>
-          </a:p>
-          <a:p>
-            <a:pPr marL="0" lvl="0" indent="0" algn="l" rtl="0">
-              <a:lnSpc>
-                <a:spcPct val="150000"/>
-              </a:lnSpc>
-              <a:spcBef>
-                <a:spcPts val="0"/>
-              </a:spcBef>
-              <a:spcAft>
-                <a:spcPts val="0"/>
-              </a:spcAft>
-              <a:buSzPts val="1100"/>
-              <a:buNone/>
-            </a:pPr>
-            <a:r>
-              <a:rPr lang="en" sz="1350">
-                <a:latin typeface="Calibri"/>
-                <a:ea typeface="Calibri"/>
-                <a:cs typeface="Calibri"/>
-                <a:sym typeface="Calibri"/>
-              </a:rPr>
-              <a:t>3. Are market reactions to financial news and regulation geographically concentrated, affecting certain regions more than others?</a:t>
-            </a:r>
-            <a:endParaRPr sz="1350">
-              <a:latin typeface="Calibri"/>
-              <a:ea typeface="Calibri"/>
-              <a:cs typeface="Calibri"/>
-              <a:sym typeface="Calibri"/>
-            </a:endParaRPr>
-          </a:p>
-          <a:p>
-            <a:pPr marL="0" lvl="0" indent="0" algn="l" rtl="0">
-              <a:lnSpc>
-                <a:spcPct val="150000"/>
-              </a:lnSpc>
-              <a:spcBef>
-                <a:spcPts val="0"/>
-              </a:spcBef>
-              <a:spcAft>
-                <a:spcPts val="0"/>
-              </a:spcAft>
-              <a:buSzPts val="1100"/>
-              <a:buNone/>
-            </a:pPr>
-            <a:endParaRPr sz="1350">
-              <a:latin typeface="Calibri"/>
-              <a:ea typeface="Calibri"/>
-              <a:cs typeface="Calibri"/>
-              <a:sym typeface="Calibri"/>
-            </a:endParaRPr>
-          </a:p>
-          <a:p>
-            <a:pPr marL="0" lvl="0" indent="0" algn="l" rtl="0">
-              <a:lnSpc>
-                <a:spcPct val="150000"/>
-              </a:lnSpc>
-              <a:spcBef>
-                <a:spcPts val="0"/>
-              </a:spcBef>
-              <a:spcAft>
-                <a:spcPts val="0"/>
-              </a:spcAft>
-              <a:buSzPts val="1100"/>
-              <a:buNone/>
-            </a:pPr>
-            <a:r>
-              <a:rPr lang="en" sz="1350" b="1">
-                <a:latin typeface="Calibri"/>
-                <a:ea typeface="Calibri"/>
-                <a:cs typeface="Calibri"/>
-                <a:sym typeface="Calibri"/>
-              </a:rPr>
-              <a:t>Figure out how AI-based text analysis could support financial stability monitoring and regulatory decision-making</a:t>
-            </a:r>
-            <a:endParaRPr sz="1350" b="1">
-              <a:latin typeface="Calibri"/>
-              <a:ea typeface="Calibri"/>
-              <a:cs typeface="Calibri"/>
-              <a:sym typeface="Calibri"/>
-            </a:endParaRPr>
-          </a:p>
-          <a:p>
-            <a:pPr marL="0" lvl="0" indent="0" algn="l" rtl="0">
-              <a:lnSpc>
-                <a:spcPct val="150000"/>
-              </a:lnSpc>
-              <a:spcBef>
-                <a:spcPts val="0"/>
-              </a:spcBef>
-              <a:spcAft>
-                <a:spcPts val="0"/>
-              </a:spcAft>
-              <a:buSzPts val="1100"/>
-              <a:buNone/>
-            </a:pPr>
-            <a:endParaRPr sz="1350">
+            <a:endParaRPr sz="1350" dirty="0">
               <a:latin typeface="Calibri"/>
               <a:ea typeface="Calibri"/>
               <a:cs typeface="Calibri"/>
@@ -17227,68 +17242,6 @@
       </p:sp>
       <p:sp>
         <p:nvSpPr>
-          <p:cNvPr id="148" name="Google Shape;148;p26"/>
-          <p:cNvSpPr txBox="1"/>
-          <p:nvPr/>
-        </p:nvSpPr>
-        <p:spPr>
-          <a:xfrm>
-            <a:off x="182880" y="4887468"/>
-            <a:ext cx="6400800" cy="230700"/>
-          </a:xfrm>
-          <a:prstGeom prst="rect">
-            <a:avLst/>
-          </a:prstGeom>
-          <a:noFill/>
-          <a:ln>
-            <a:noFill/>
-          </a:ln>
-        </p:spPr>
-        <p:txBody>
-          <a:bodyPr spcFirstLastPara="1" wrap="square" lIns="91425" tIns="45700" rIns="91425" bIns="45700" anchor="t" anchorCtr="0">
-            <a:spAutoFit/>
-          </a:bodyPr>
-          <a:lstStyle/>
-          <a:p>
-            <a:pPr marL="0" marR="0" lvl="0" indent="0" algn="l" rtl="0">
-              <a:spcBef>
-                <a:spcPts val="0"/>
-              </a:spcBef>
-              <a:spcAft>
-                <a:spcPts val="0"/>
-              </a:spcAft>
-              <a:buNone/>
-            </a:pPr>
-            <a:r>
-              <a:rPr lang="en" sz="900" b="0" i="0" u="none" strike="noStrike" cap="none">
-                <a:solidFill>
-                  <a:srgbClr val="FFFFFF"/>
-                </a:solidFill>
-                <a:latin typeface="Calibri"/>
-                <a:ea typeface="Calibri"/>
-                <a:cs typeface="Calibri"/>
-                <a:sym typeface="Calibri"/>
-              </a:rPr>
-              <a:t>Oligarchic Vers</a:t>
-            </a:r>
-            <a:r>
-              <a:rPr lang="en" sz="900">
-                <a:solidFill>
-                  <a:srgbClr val="FFFFFF"/>
-                </a:solidFill>
-                <a:latin typeface="Calibri"/>
-                <a:ea typeface="Calibri"/>
-                <a:cs typeface="Calibri"/>
-                <a:sym typeface="Calibri"/>
-              </a:rPr>
-              <a:t>us Democratic Societies</a:t>
-            </a:r>
-            <a:endParaRPr/>
-          </a:p>
-        </p:txBody>
-      </p:sp>
-      <p:sp>
-        <p:nvSpPr>
           <p:cNvPr id="149" name="Google Shape;149;p26"/>
           <p:cNvSpPr txBox="1"/>
           <p:nvPr/>
@@ -17296,7 +17249,7 @@
         <p:spPr>
           <a:xfrm>
             <a:off x="6583680" y="4887468"/>
-            <a:ext cx="2377440" cy="256032"/>
+            <a:ext cx="2377440" cy="230792"/>
           </a:xfrm>
           <a:prstGeom prst="rect">
             <a:avLst/>
@@ -17322,7 +17275,7 @@
               <a:buNone/>
             </a:pPr>
             <a:r>
-              <a:rPr lang="en" sz="900" b="0" i="0" u="none" strike="noStrike" cap="none">
+              <a:rPr lang="en" sz="900" b="0" i="0" u="none" strike="noStrike" cap="none" dirty="0">
                 <a:solidFill>
                   <a:srgbClr val="FFFFFF"/>
                 </a:solidFill>
@@ -17331,9 +17284,21 @@
                 <a:cs typeface="Calibri"/>
                 <a:sym typeface="Calibri"/>
               </a:rPr>
-              <a:t>2 / 26</a:t>
+              <a:t>2 / </a:t>
             </a:r>
-            <a:endParaRPr/>
+            <a:r>
+              <a:rPr lang="en" sz="900" dirty="0">
+                <a:solidFill>
+                  <a:srgbClr val="FFFFFF"/>
+                </a:solidFill>
+                <a:latin typeface="Calibri"/>
+                <a:ea typeface="Calibri"/>
+                <a:cs typeface="Calibri"/>
+                <a:sym typeface="Calibri"/>
+              </a:rPr>
+              <a:t>8</a:t>
+            </a:r>
+            <a:endParaRPr dirty="0"/>
           </a:p>
         </p:txBody>
       </p:sp>
@@ -17365,6 +17330,54 @@
           </a:ln>
         </p:spPr>
       </p:pic>
+      <p:sp>
+        <p:nvSpPr>
+          <p:cNvPr id="3" name="Google Shape;136;p25">
+            <a:extLst>
+              <a:ext uri="{FF2B5EF4-FFF2-40B4-BE49-F238E27FC236}">
+                <a16:creationId xmlns:a16="http://schemas.microsoft.com/office/drawing/2014/main" id="{CBF99D3E-8F70-10C8-4E30-E3C2F23BDA76}"/>
+              </a:ext>
+            </a:extLst>
+          </p:cNvPr>
+          <p:cNvSpPr txBox="1"/>
+          <p:nvPr/>
+        </p:nvSpPr>
+        <p:spPr>
+          <a:xfrm>
+            <a:off x="182880" y="4887468"/>
+            <a:ext cx="6400800" cy="230792"/>
+          </a:xfrm>
+          <a:prstGeom prst="rect">
+            <a:avLst/>
+          </a:prstGeom>
+          <a:noFill/>
+          <a:ln>
+            <a:noFill/>
+          </a:ln>
+        </p:spPr>
+        <p:txBody>
+          <a:bodyPr spcFirstLastPara="1" wrap="square" lIns="91425" tIns="45700" rIns="91425" bIns="45700" anchor="t" anchorCtr="0">
+            <a:spAutoFit/>
+          </a:bodyPr>
+          <a:lstStyle/>
+          <a:p>
+            <a:pPr lvl="0"/>
+            <a:r>
+              <a:rPr lang="en-US" sz="900" dirty="0">
+                <a:solidFill>
+                  <a:srgbClr val="FFFFFF"/>
+                </a:solidFill>
+                <a:latin typeface="Calibri"/>
+                <a:ea typeface="Calibri"/>
+                <a:cs typeface="Calibri"/>
+                <a:sym typeface="Calibri"/>
+              </a:rPr>
+              <a:t>Data Analytics and Visualization for PublicPolicy</a:t>
+            </a:r>
+            <a:endParaRPr dirty="0"/>
+          </a:p>
+        </p:txBody>
+      </p:sp>
     </p:spTree>
   </p:cSld>
   <p:clrMapOvr>
@@ -17531,7 +17544,7 @@
         <p:spPr>
           <a:xfrm>
             <a:off x="365700" y="904200"/>
-            <a:ext cx="8412600" cy="3559500"/>
+            <a:ext cx="8412600" cy="3615565"/>
           </a:xfrm>
           <a:prstGeom prst="rect">
             <a:avLst/>
@@ -17557,24 +17570,24 @@
               <a:buNone/>
             </a:pPr>
             <a:r>
-              <a:rPr lang="en" sz="1450" b="1">
-                <a:latin typeface="Calibri"/>
+              <a:rPr lang="en" sz="1450" b="1" dirty="0">
+                <a:latin typeface="Times New Roman" panose="02020603050405020304" pitchFamily="18" charset="0"/>
                 <a:ea typeface="Calibri"/>
-                <a:cs typeface="Calibri"/>
+                <a:cs typeface="Times New Roman" panose="02020603050405020304" pitchFamily="18" charset="0"/>
                 <a:sym typeface="Calibri"/>
               </a:rPr>
               <a:t>RAW DATA</a:t>
             </a:r>
-            <a:endParaRPr sz="900" b="1">
+            <a:endParaRPr sz="900" b="1" dirty="0">
               <a:solidFill>
                 <a:srgbClr val="000080"/>
               </a:solidFill>
               <a:highlight>
                 <a:srgbClr val="FFFFFF"/>
               </a:highlight>
-              <a:latin typeface="Courier New"/>
+              <a:latin typeface="Times New Roman" panose="02020603050405020304" pitchFamily="18" charset="0"/>
               <a:ea typeface="Courier New"/>
-              <a:cs typeface="Courier New"/>
+              <a:cs typeface="Times New Roman" panose="02020603050405020304" pitchFamily="18" charset="0"/>
               <a:sym typeface="Courier New"/>
             </a:endParaRPr>
           </a:p>
@@ -17588,10 +17601,10 @@
               </a:spcAft>
               <a:buNone/>
             </a:pPr>
-            <a:endParaRPr sz="1450" b="1">
-              <a:latin typeface="Calibri"/>
+            <a:endParaRPr sz="1450" b="1" dirty="0">
+              <a:latin typeface="Times New Roman" panose="02020603050405020304" pitchFamily="18" charset="0"/>
               <a:ea typeface="Calibri"/>
-              <a:cs typeface="Calibri"/>
+              <a:cs typeface="Times New Roman" panose="02020603050405020304" pitchFamily="18" charset="0"/>
               <a:sym typeface="Calibri"/>
             </a:endParaRPr>
           </a:p>
@@ -17610,33 +17623,33 @@
               <a:buNone/>
             </a:pPr>
             <a:r>
-              <a:rPr lang="en" sz="1350">
-                <a:latin typeface="Calibri"/>
+              <a:rPr lang="en" sz="1350" dirty="0">
+                <a:latin typeface="Times New Roman" panose="02020603050405020304" pitchFamily="18" charset="0"/>
                 <a:ea typeface="Calibri"/>
-                <a:cs typeface="Calibri"/>
+                <a:cs typeface="Times New Roman" panose="02020603050405020304" pitchFamily="18" charset="0"/>
                 <a:sym typeface="Calibri"/>
               </a:rPr>
               <a:t>1.</a:t>
             </a:r>
             <a:r>
-              <a:rPr lang="en" sz="1350">
+              <a:rPr lang="en" sz="1350" dirty="0">
                 <a:solidFill>
                   <a:schemeClr val="dk1"/>
                 </a:solidFill>
-                <a:latin typeface="Calibri"/>
+                <a:latin typeface="Times New Roman" panose="02020603050405020304" pitchFamily="18" charset="0"/>
                 <a:ea typeface="Calibri"/>
-                <a:cs typeface="Calibri"/>
+                <a:cs typeface="Times New Roman" panose="02020603050405020304" pitchFamily="18" charset="0"/>
                 <a:sym typeface="Calibri"/>
               </a:rPr>
               <a:t>Financial News &amp; Regulatory Text Data</a:t>
             </a:r>
-            <a:endParaRPr sz="1350">
+            <a:endParaRPr sz="1350" dirty="0">
               <a:solidFill>
                 <a:schemeClr val="dk1"/>
               </a:solidFill>
-              <a:latin typeface="Calibri"/>
+              <a:latin typeface="Times New Roman" panose="02020603050405020304" pitchFamily="18" charset="0"/>
               <a:ea typeface="Calibri"/>
-              <a:cs typeface="Calibri"/>
+              <a:cs typeface="Times New Roman" panose="02020603050405020304" pitchFamily="18" charset="0"/>
               <a:sym typeface="Calibri"/>
             </a:endParaRPr>
           </a:p>
@@ -17654,24 +17667,24 @@
               <a:buNone/>
             </a:pPr>
             <a:r>
-              <a:rPr lang="en" sz="1350">
+              <a:rPr lang="en" sz="1350" dirty="0">
                 <a:solidFill>
                   <a:schemeClr val="dk1"/>
                 </a:solidFill>
-                <a:latin typeface="Calibri"/>
+                <a:latin typeface="Times New Roman" panose="02020603050405020304" pitchFamily="18" charset="0"/>
                 <a:ea typeface="Calibri"/>
-                <a:cs typeface="Calibri"/>
+                <a:cs typeface="Times New Roman" panose="02020603050405020304" pitchFamily="18" charset="0"/>
                 <a:sym typeface="Calibri"/>
               </a:rPr>
               <a:t>Daily financial headlines from Kaggle and other news partners, with timestamps and tickers.</a:t>
             </a:r>
-            <a:endParaRPr sz="1350">
+            <a:endParaRPr sz="1350" dirty="0">
               <a:solidFill>
                 <a:schemeClr val="dk1"/>
               </a:solidFill>
-              <a:latin typeface="Calibri"/>
+              <a:latin typeface="Times New Roman" panose="02020603050405020304" pitchFamily="18" charset="0"/>
               <a:ea typeface="Calibri"/>
-              <a:cs typeface="Calibri"/>
+              <a:cs typeface="Times New Roman" panose="02020603050405020304" pitchFamily="18" charset="0"/>
               <a:sym typeface="Calibri"/>
             </a:endParaRPr>
           </a:p>
@@ -17689,24 +17702,24 @@
               <a:buNone/>
             </a:pPr>
             <a:r>
-              <a:rPr lang="en" sz="1350">
+              <a:rPr lang="en" sz="1350" dirty="0">
                 <a:solidFill>
                   <a:schemeClr val="dk1"/>
                 </a:solidFill>
-                <a:latin typeface="Calibri"/>
+                <a:latin typeface="Times New Roman" panose="02020603050405020304" pitchFamily="18" charset="0"/>
                 <a:ea typeface="Calibri"/>
-                <a:cs typeface="Calibri"/>
+                <a:cs typeface="Times New Roman" panose="02020603050405020304" pitchFamily="18" charset="0"/>
                 <a:sym typeface="Calibri"/>
               </a:rPr>
               <a:t>Used to train a light sentiment classifier (positive / negative / neutral) and to build yearly indices of regulatory‑news sentiment.</a:t>
             </a:r>
-            <a:endParaRPr sz="1350">
+            <a:endParaRPr sz="1350" dirty="0">
               <a:solidFill>
                 <a:schemeClr val="dk1"/>
               </a:solidFill>
-              <a:latin typeface="Calibri"/>
+              <a:latin typeface="Times New Roman" panose="02020603050405020304" pitchFamily="18" charset="0"/>
               <a:ea typeface="Calibri"/>
-              <a:cs typeface="Calibri"/>
+              <a:cs typeface="Times New Roman" panose="02020603050405020304" pitchFamily="18" charset="0"/>
               <a:sym typeface="Calibri"/>
             </a:endParaRPr>
           </a:p>
@@ -17725,24 +17738,24 @@
               <a:buNone/>
             </a:pPr>
             <a:r>
-              <a:rPr lang="en" sz="1350">
+              <a:rPr lang="en" sz="1350" dirty="0">
                 <a:solidFill>
                   <a:schemeClr val="dk1"/>
                 </a:solidFill>
-                <a:latin typeface="Calibri"/>
+                <a:latin typeface="Times New Roman" panose="02020603050405020304" pitchFamily="18" charset="0"/>
                 <a:ea typeface="Calibri"/>
-                <a:cs typeface="Calibri"/>
+                <a:cs typeface="Times New Roman" panose="02020603050405020304" pitchFamily="18" charset="0"/>
                 <a:sym typeface="Calibri"/>
               </a:rPr>
               <a:t>2.Banking fundamentals (FDIC) Data</a:t>
             </a:r>
-            <a:endParaRPr sz="1350">
+            <a:endParaRPr sz="1350" dirty="0">
               <a:solidFill>
                 <a:schemeClr val="dk1"/>
               </a:solidFill>
-              <a:latin typeface="Calibri"/>
+              <a:latin typeface="Times New Roman" panose="02020603050405020304" pitchFamily="18" charset="0"/>
               <a:ea typeface="Calibri"/>
-              <a:cs typeface="Calibri"/>
+              <a:cs typeface="Times New Roman" panose="02020603050405020304" pitchFamily="18" charset="0"/>
               <a:sym typeface="Calibri"/>
             </a:endParaRPr>
           </a:p>
@@ -17760,24 +17773,24 @@
               <a:buNone/>
             </a:pPr>
             <a:r>
-              <a:rPr lang="en" sz="1350">
+              <a:rPr lang="en" sz="1350" dirty="0">
                 <a:solidFill>
                   <a:schemeClr val="dk1"/>
                 </a:solidFill>
-                <a:latin typeface="Calibri"/>
+                <a:latin typeface="Times New Roman" panose="02020603050405020304" pitchFamily="18" charset="0"/>
                 <a:ea typeface="Calibri"/>
-                <a:cs typeface="Calibri"/>
+                <a:cs typeface="Times New Roman" panose="02020603050405020304" pitchFamily="18" charset="0"/>
                 <a:sym typeface="Calibri"/>
               </a:rPr>
               <a:t>FDIC state‑level “Summary of Results” for commercial banks – financial.</a:t>
             </a:r>
-            <a:endParaRPr sz="1350">
+            <a:endParaRPr sz="1350" dirty="0">
               <a:solidFill>
                 <a:schemeClr val="dk1"/>
               </a:solidFill>
-              <a:latin typeface="Calibri"/>
+              <a:latin typeface="Times New Roman" panose="02020603050405020304" pitchFamily="18" charset="0"/>
               <a:ea typeface="Calibri"/>
-              <a:cs typeface="Calibri"/>
+              <a:cs typeface="Times New Roman" panose="02020603050405020304" pitchFamily="18" charset="0"/>
               <a:sym typeface="Calibri"/>
             </a:endParaRPr>
           </a:p>
@@ -17795,24 +17808,24 @@
               <a:buNone/>
             </a:pPr>
             <a:r>
-              <a:rPr lang="en" sz="1350">
+              <a:rPr lang="en" sz="1350" dirty="0">
                 <a:solidFill>
                   <a:schemeClr val="dk1"/>
                 </a:solidFill>
-                <a:latin typeface="Calibri"/>
+                <a:latin typeface="Times New Roman" panose="02020603050405020304" pitchFamily="18" charset="0"/>
                 <a:ea typeface="Calibri"/>
-                <a:cs typeface="Calibri"/>
+                <a:cs typeface="Times New Roman" panose="02020603050405020304" pitchFamily="18" charset="0"/>
                 <a:sym typeface="Calibri"/>
               </a:rPr>
               <a:t>State–year totals for assets, net income, number of banks, net interest margin (NIM), and related balance‑sheet items.</a:t>
             </a:r>
-            <a:endParaRPr sz="1350">
+            <a:endParaRPr sz="1350" dirty="0">
               <a:solidFill>
                 <a:schemeClr val="dk1"/>
               </a:solidFill>
-              <a:latin typeface="Calibri"/>
+              <a:latin typeface="Times New Roman" panose="02020603050405020304" pitchFamily="18" charset="0"/>
               <a:ea typeface="Calibri"/>
-              <a:cs typeface="Calibri"/>
+              <a:cs typeface="Times New Roman" panose="02020603050405020304" pitchFamily="18" charset="0"/>
               <a:sym typeface="Calibri"/>
             </a:endParaRPr>
           </a:p>
@@ -17831,18 +17844,18 @@
               <a:buNone/>
             </a:pPr>
             <a:r>
-              <a:rPr lang="en" sz="1350">
-                <a:latin typeface="Calibri"/>
+              <a:rPr lang="en" sz="1350" dirty="0">
+                <a:latin typeface="Times New Roman" panose="02020603050405020304" pitchFamily="18" charset="0"/>
                 <a:ea typeface="Calibri"/>
-                <a:cs typeface="Calibri"/>
+                <a:cs typeface="Times New Roman" panose="02020603050405020304" pitchFamily="18" charset="0"/>
                 <a:sym typeface="Calibri"/>
               </a:rPr>
               <a:t>3.Geographic Data for Banks</a:t>
             </a:r>
-            <a:endParaRPr sz="1350">
-              <a:latin typeface="Calibri"/>
+            <a:endParaRPr sz="1350" dirty="0">
+              <a:latin typeface="Times New Roman" panose="02020603050405020304" pitchFamily="18" charset="0"/>
               <a:ea typeface="Calibri"/>
-              <a:cs typeface="Calibri"/>
+              <a:cs typeface="Times New Roman" panose="02020603050405020304" pitchFamily="18" charset="0"/>
               <a:sym typeface="Calibri"/>
             </a:endParaRPr>
           </a:p>
@@ -17860,24 +17873,24 @@
               <a:buNone/>
             </a:pPr>
             <a:r>
-              <a:rPr lang="en" sz="1350">
+              <a:rPr lang="en" sz="1350" dirty="0">
                 <a:solidFill>
                   <a:schemeClr val="dk1"/>
                 </a:solidFill>
-                <a:latin typeface="Calibri"/>
+                <a:latin typeface="Times New Roman" panose="02020603050405020304" pitchFamily="18" charset="0"/>
                 <a:ea typeface="Calibri"/>
-                <a:cs typeface="Calibri"/>
+                <a:cs typeface="Times New Roman" panose="02020603050405020304" pitchFamily="18" charset="0"/>
                 <a:sym typeface="Calibri"/>
               </a:rPr>
               <a:t>U.S. Census TIGER/Line shapefiles for U.S. states (cb_2024_us_state_20m).</a:t>
             </a:r>
-            <a:endParaRPr sz="1350">
+            <a:endParaRPr sz="1350" dirty="0">
               <a:solidFill>
                 <a:schemeClr val="dk1"/>
               </a:solidFill>
-              <a:latin typeface="Calibri"/>
+              <a:latin typeface="Times New Roman" panose="02020603050405020304" pitchFamily="18" charset="0"/>
               <a:ea typeface="Calibri"/>
-              <a:cs typeface="Calibri"/>
+              <a:cs typeface="Times New Roman" panose="02020603050405020304" pitchFamily="18" charset="0"/>
               <a:sym typeface="Calibri"/>
             </a:endParaRPr>
           </a:p>
@@ -17895,21 +17908,21 @@
               <a:buNone/>
             </a:pPr>
             <a:r>
-              <a:rPr lang="en" sz="1350">
+              <a:rPr lang="en" sz="1350" dirty="0">
                 <a:solidFill>
                   <a:schemeClr val="dk1"/>
                 </a:solidFill>
-                <a:latin typeface="Calibri"/>
+                <a:latin typeface="Times New Roman" panose="02020603050405020304" pitchFamily="18" charset="0"/>
                 <a:ea typeface="Calibri"/>
-                <a:cs typeface="Calibri"/>
+                <a:cs typeface="Times New Roman" panose="02020603050405020304" pitchFamily="18" charset="0"/>
                 <a:sym typeface="Calibri"/>
               </a:rPr>
               <a:t>Provides state boundaries used to draw choropleth maps of banking stress.</a:t>
             </a:r>
-            <a:endParaRPr sz="1350">
-              <a:latin typeface="Calibri"/>
+            <a:endParaRPr sz="1350" dirty="0">
+              <a:latin typeface="Times New Roman" panose="02020603050405020304" pitchFamily="18" charset="0"/>
               <a:ea typeface="Calibri"/>
-              <a:cs typeface="Calibri"/>
+              <a:cs typeface="Times New Roman" panose="02020603050405020304" pitchFamily="18" charset="0"/>
               <a:sym typeface="Calibri"/>
             </a:endParaRPr>
           </a:p>
@@ -17972,56 +17985,6 @@
       </p:sp>
       <p:sp>
         <p:nvSpPr>
-          <p:cNvPr id="160" name="Google Shape;160;p27"/>
-          <p:cNvSpPr txBox="1"/>
-          <p:nvPr/>
-        </p:nvSpPr>
-        <p:spPr>
-          <a:xfrm>
-            <a:off x="182880" y="4887468"/>
-            <a:ext cx="6400800" cy="230700"/>
-          </a:xfrm>
-          <a:prstGeom prst="rect">
-            <a:avLst/>
-          </a:prstGeom>
-          <a:noFill/>
-          <a:ln>
-            <a:noFill/>
-          </a:ln>
-        </p:spPr>
-        <p:txBody>
-          <a:bodyPr spcFirstLastPara="1" wrap="square" lIns="91425" tIns="45700" rIns="91425" bIns="45700" anchor="t" anchorCtr="0">
-            <a:spAutoFit/>
-          </a:bodyPr>
-          <a:lstStyle/>
-          <a:p>
-            <a:pPr marL="0" marR="0" lvl="0" indent="0" algn="l" rtl="0">
-              <a:spcBef>
-                <a:spcPts val="0"/>
-              </a:spcBef>
-              <a:spcAft>
-                <a:spcPts val="0"/>
-              </a:spcAft>
-              <a:buNone/>
-            </a:pPr>
-            <a:r>
-              <a:rPr lang="en" sz="900" b="0" i="0" u="none" strike="noStrike" cap="none">
-                <a:solidFill>
-                  <a:srgbClr val="FFFFFF"/>
-                </a:solidFill>
-                <a:latin typeface="Calibri"/>
-                <a:ea typeface="Calibri"/>
-                <a:cs typeface="Calibri"/>
-                <a:sym typeface="Calibri"/>
-              </a:rPr>
-              <a:t>Oligarchic Versus Democratic Societies</a:t>
-            </a:r>
-            <a:endParaRPr/>
-          </a:p>
-        </p:txBody>
-      </p:sp>
-      <p:sp>
-        <p:nvSpPr>
           <p:cNvPr id="161" name="Google Shape;161;p27"/>
           <p:cNvSpPr txBox="1"/>
           <p:nvPr/>
@@ -18055,7 +18018,7 @@
               <a:buNone/>
             </a:pPr>
             <a:r>
-              <a:rPr lang="en" sz="900" b="0" i="0" u="none" strike="noStrike" cap="none">
+              <a:rPr lang="en" sz="900" dirty="0">
                 <a:solidFill>
                   <a:srgbClr val="FFFFFF"/>
                 </a:solidFill>
@@ -18064,9 +18027,33 @@
                 <a:cs typeface="Calibri"/>
                 <a:sym typeface="Calibri"/>
               </a:rPr>
-              <a:t>2 / 26</a:t>
+              <a:t>3</a:t>
             </a:r>
-            <a:endParaRPr/>
+            <a:r>
+              <a:rPr lang="en" sz="900" b="0" i="0" u="none" strike="noStrike" cap="none" dirty="0">
+                <a:solidFill>
+                  <a:srgbClr val="FFFFFF"/>
+                </a:solidFill>
+                <a:latin typeface="Calibri"/>
+                <a:ea typeface="Calibri"/>
+                <a:cs typeface="Calibri"/>
+                <a:sym typeface="Calibri"/>
+              </a:rPr>
+              <a:t> / </a:t>
+            </a:r>
+            <a:r>
+              <a:rPr lang="en" sz="900" dirty="0">
+                <a:solidFill>
+                  <a:srgbClr val="FFFFFF"/>
+                </a:solidFill>
+                <a:latin typeface="Calibri"/>
+                <a:ea typeface="Calibri"/>
+                <a:cs typeface="Calibri"/>
+                <a:sym typeface="Calibri"/>
+              </a:rPr>
+              <a:t>8</a:t>
+            </a:r>
+            <a:endParaRPr dirty="0"/>
           </a:p>
         </p:txBody>
       </p:sp>
@@ -18098,6 +18085,54 @@
           </a:ln>
         </p:spPr>
       </p:pic>
+      <p:sp>
+        <p:nvSpPr>
+          <p:cNvPr id="2" name="Google Shape;136;p25">
+            <a:extLst>
+              <a:ext uri="{FF2B5EF4-FFF2-40B4-BE49-F238E27FC236}">
+                <a16:creationId xmlns:a16="http://schemas.microsoft.com/office/drawing/2014/main" id="{9D80B8A8-4F63-ADE7-F6E6-D804A2E05D50}"/>
+              </a:ext>
+            </a:extLst>
+          </p:cNvPr>
+          <p:cNvSpPr txBox="1"/>
+          <p:nvPr/>
+        </p:nvSpPr>
+        <p:spPr>
+          <a:xfrm>
+            <a:off x="182880" y="4887468"/>
+            <a:ext cx="6400800" cy="230792"/>
+          </a:xfrm>
+          <a:prstGeom prst="rect">
+            <a:avLst/>
+          </a:prstGeom>
+          <a:noFill/>
+          <a:ln>
+            <a:noFill/>
+          </a:ln>
+        </p:spPr>
+        <p:txBody>
+          <a:bodyPr spcFirstLastPara="1" wrap="square" lIns="91425" tIns="45700" rIns="91425" bIns="45700" anchor="t" anchorCtr="0">
+            <a:spAutoFit/>
+          </a:bodyPr>
+          <a:lstStyle/>
+          <a:p>
+            <a:pPr lvl="0"/>
+            <a:r>
+              <a:rPr lang="en-US" sz="900" dirty="0">
+                <a:solidFill>
+                  <a:srgbClr val="FFFFFF"/>
+                </a:solidFill>
+                <a:latin typeface="Calibri"/>
+                <a:ea typeface="Calibri"/>
+                <a:cs typeface="Calibri"/>
+                <a:sym typeface="Calibri"/>
+              </a:rPr>
+              <a:t>Data Analytics and Visualization for Public Policy</a:t>
+            </a:r>
+            <a:endParaRPr dirty="0"/>
+          </a:p>
+        </p:txBody>
+      </p:sp>
     </p:spTree>
   </p:cSld>
   <p:clrMapOvr>
@@ -18244,14 +18279,17 @@
                 <a:solidFill>
                   <a:srgbClr val="800000"/>
                 </a:solidFill>
-                <a:latin typeface="Calibri"/>
+                <a:latin typeface="Times New Roman" panose="02020603050405020304" pitchFamily="18" charset="0"/>
                 <a:ea typeface="Calibri"/>
-                <a:cs typeface="Calibri"/>
+                <a:cs typeface="Times New Roman" panose="02020603050405020304" pitchFamily="18" charset="0"/>
                 <a:sym typeface="Calibri"/>
               </a:rPr>
               <a:t>Data</a:t>
             </a:r>
-            <a:endParaRPr/>
+            <a:endParaRPr>
+              <a:latin typeface="Times New Roman" panose="02020603050405020304" pitchFamily="18" charset="0"/>
+              <a:cs typeface="Times New Roman" panose="02020603050405020304" pitchFamily="18" charset="0"/>
+            </a:endParaRPr>
           </a:p>
         </p:txBody>
       </p:sp>
@@ -18263,8 +18301,8 @@
         </p:nvSpPr>
         <p:spPr>
           <a:xfrm>
-            <a:off x="365700" y="904200"/>
-            <a:ext cx="8412600" cy="3548400"/>
+            <a:off x="365700" y="3501096"/>
+            <a:ext cx="8412600" cy="1248891"/>
           </a:xfrm>
           <a:prstGeom prst="rect">
             <a:avLst/>
@@ -18280,51 +18318,25 @@
           </a:bodyPr>
           <a:lstStyle/>
           <a:p>
-            <a:pPr marL="0" marR="0" lvl="0" indent="0" algn="l" rtl="0">
-              <a:spcBef>
-                <a:spcPts val="0"/>
+            <a:pPr marL="457200" lvl="0" indent="0" algn="l" rtl="0">
+              <a:lnSpc>
+                <a:spcPct val="115000"/>
+              </a:lnSpc>
+              <a:spcBef>
+                <a:spcPts val="200"/>
               </a:spcBef>
               <a:spcAft>
                 <a:spcPts val="0"/>
               </a:spcAft>
               <a:buNone/>
             </a:pPr>
-            <a:r>
-              <a:rPr lang="en" sz="1450" b="1" dirty="0">
-                <a:latin typeface="Calibri"/>
-                <a:ea typeface="Calibri"/>
-                <a:cs typeface="Calibri"/>
-                <a:sym typeface="Calibri"/>
-              </a:rPr>
-              <a:t>DERIVED DATA</a:t>
-            </a:r>
-            <a:endParaRPr sz="900" b="1" dirty="0">
+            <a:endParaRPr sz="1350" dirty="0">
               <a:solidFill>
-                <a:srgbClr val="000080"/>
+                <a:schemeClr val="dk1"/>
               </a:solidFill>
-              <a:highlight>
-                <a:srgbClr val="FFFFFF"/>
-              </a:highlight>
-              <a:latin typeface="Courier New"/>
-              <a:ea typeface="Courier New"/>
-              <a:cs typeface="Courier New"/>
-              <a:sym typeface="Courier New"/>
-            </a:endParaRPr>
-          </a:p>
-          <a:p>
-            <a:pPr marL="0" marR="0" lvl="0" indent="0" algn="l" rtl="0">
-              <a:spcBef>
-                <a:spcPts val="0"/>
-              </a:spcBef>
-              <a:spcAft>
-                <a:spcPts val="0"/>
-              </a:spcAft>
-              <a:buNone/>
-            </a:pPr>
-            <a:endParaRPr sz="1450" b="1" dirty="0">
-              <a:latin typeface="Calibri"/>
+              <a:latin typeface="Times New Roman" panose="02020603050405020304" pitchFamily="18" charset="0"/>
               <a:ea typeface="Calibri"/>
-              <a:cs typeface="Calibri"/>
+              <a:cs typeface="Times New Roman" panose="02020603050405020304" pitchFamily="18" charset="0"/>
               <a:sym typeface="Calibri"/>
             </a:endParaRPr>
           </a:p>
@@ -18334,7 +18346,7 @@
                 <a:spcPct val="150000"/>
               </a:lnSpc>
               <a:spcBef>
-                <a:spcPts val="0"/>
+                <a:spcPts val="200"/>
               </a:spcBef>
               <a:spcAft>
                 <a:spcPts val="0"/>
@@ -18342,34 +18354,25 @@
               <a:buSzPts val="1100"/>
               <a:buNone/>
             </a:pPr>
-            <a:r>
-              <a:rPr lang="en" sz="1350" dirty="0">
-                <a:latin typeface="Calibri"/>
-                <a:ea typeface="Calibri"/>
-                <a:cs typeface="Calibri"/>
-                <a:sym typeface="Calibri"/>
-              </a:rPr>
-              <a:t>1.</a:t>
-            </a:r>
             <a:r>
               <a:rPr lang="en" sz="1350" dirty="0">
                 <a:solidFill>
                   <a:schemeClr val="dk1"/>
                 </a:solidFill>
-                <a:latin typeface="Calibri"/>
+                <a:latin typeface="Times New Roman" panose="02020603050405020304" pitchFamily="18" charset="0"/>
                 <a:ea typeface="Calibri"/>
-                <a:cs typeface="Calibri"/>
+                <a:cs typeface="Times New Roman" panose="02020603050405020304" pitchFamily="18" charset="0"/>
                 <a:sym typeface="Calibri"/>
               </a:rPr>
-              <a:t>State–Year Banking Stress Panel</a:t>
+              <a:t>2.Visualization Outputs</a:t>
             </a:r>
             <a:endParaRPr sz="1350" dirty="0">
               <a:solidFill>
                 <a:schemeClr val="dk1"/>
               </a:solidFill>
-              <a:latin typeface="Calibri"/>
+              <a:latin typeface="Times New Roman" panose="02020603050405020304" pitchFamily="18" charset="0"/>
               <a:ea typeface="Calibri"/>
-              <a:cs typeface="Calibri"/>
+              <a:cs typeface="Times New Roman" panose="02020603050405020304" pitchFamily="18" charset="0"/>
               <a:sym typeface="Calibri"/>
             </a:endParaRPr>
           </a:p>
@@ -18391,20 +18394,20 @@
                 <a:solidFill>
                   <a:schemeClr val="dk1"/>
                 </a:solidFill>
-                <a:latin typeface="Calibri"/>
+                <a:latin typeface="Times New Roman" panose="02020603050405020304" pitchFamily="18" charset="0"/>
                 <a:ea typeface="Calibri"/>
-                <a:cs typeface="Calibri"/>
+                <a:cs typeface="Times New Roman" panose="02020603050405020304" pitchFamily="18" charset="0"/>
                 <a:sym typeface="Calibri"/>
               </a:rPr>
-              <a:t>Merge FDIC state‑year fundamentals with yearly regulatory‑news sentiment.</a:t>
+              <a:t>Static scatter: regulatory‑news negativity vs. ΔROA across state–years.</a:t>
             </a:r>
             <a:endParaRPr sz="1350" dirty="0">
               <a:solidFill>
                 <a:schemeClr val="dk1"/>
               </a:solidFill>
-              <a:latin typeface="Calibri"/>
+              <a:latin typeface="Times New Roman" panose="02020603050405020304" pitchFamily="18" charset="0"/>
               <a:ea typeface="Calibri"/>
-              <a:cs typeface="Calibri"/>
+              <a:cs typeface="Times New Roman" panose="02020603050405020304" pitchFamily="18" charset="0"/>
               <a:sym typeface="Calibri"/>
             </a:endParaRPr>
           </a:p>
@@ -18417,7 +18420,7 @@
                 <a:spcPts val="200"/>
               </a:spcBef>
               <a:spcAft>
-                <a:spcPts val="0"/>
+                <a:spcPts val="200"/>
               </a:spcAft>
               <a:buNone/>
             </a:pPr>
@@ -18426,285 +18429,17 @@
                 <a:solidFill>
                   <a:schemeClr val="dk1"/>
                 </a:solidFill>
-                <a:latin typeface="Calibri"/>
+                <a:latin typeface="Times New Roman" panose="02020603050405020304" pitchFamily="18" charset="0"/>
                 <a:ea typeface="Calibri"/>
-                <a:cs typeface="Calibri"/>
-                <a:sym typeface="Calibri"/>
-              </a:rPr>
-              <a:t>For each state–year, compute:</a:t>
-            </a:r>
-            <a:endParaRPr sz="1000" dirty="0">
-              <a:solidFill>
-                <a:srgbClr val="3B3B3B"/>
-              </a:solidFill>
-              <a:highlight>
-                <a:srgbClr val="F8F8F8"/>
-              </a:highlight>
-            </a:endParaRPr>
-          </a:p>
-          <a:p>
-            <a:pPr marL="457200" lvl="0" indent="0" algn="l" rtl="0">
-              <a:lnSpc>
-                <a:spcPct val="120000"/>
-              </a:lnSpc>
-              <a:spcBef>
-                <a:spcPts val="200"/>
-              </a:spcBef>
-              <a:spcAft>
-                <a:spcPts val="0"/>
-              </a:spcAft>
-              <a:buNone/>
-            </a:pPr>
-            <a:r>
-              <a:rPr lang="en" sz="1350" dirty="0">
-                <a:solidFill>
-                  <a:schemeClr val="dk1"/>
-                </a:solidFill>
-                <a:latin typeface="Calibri"/>
-                <a:ea typeface="Calibri"/>
-                <a:cs typeface="Calibri"/>
-                <a:sym typeface="Calibri"/>
-              </a:rPr>
-              <a:t>ΔROAs,t,ΔROAs,t (change in return on assets),</a:t>
-            </a:r>
-            <a:endParaRPr sz="1350" dirty="0">
-              <a:solidFill>
-                <a:schemeClr val="dk1"/>
-              </a:solidFill>
-              <a:latin typeface="Calibri"/>
-              <a:ea typeface="Calibri"/>
-              <a:cs typeface="Calibri"/>
-              <a:sym typeface="Calibri"/>
-            </a:endParaRPr>
-          </a:p>
-          <a:p>
-            <a:pPr marL="457200" lvl="0" indent="0" algn="l" rtl="0">
-              <a:lnSpc>
-                <a:spcPct val="115000"/>
-              </a:lnSpc>
-              <a:spcBef>
-                <a:spcPts val="200"/>
-              </a:spcBef>
-              <a:spcAft>
-                <a:spcPts val="0"/>
-              </a:spcAft>
-              <a:buNone/>
-            </a:pPr>
-            <a:r>
-              <a:rPr lang="en" sz="1350" dirty="0">
-                <a:solidFill>
-                  <a:schemeClr val="dk1"/>
-                </a:solidFill>
-                <a:latin typeface="Calibri"/>
-                <a:ea typeface="Calibri"/>
-                <a:cs typeface="Calibri"/>
-                <a:sym typeface="Calibri"/>
-              </a:rPr>
-              <a:t>a binary bad_year indicator,</a:t>
-            </a:r>
-            <a:endParaRPr sz="1350" dirty="0">
-              <a:solidFill>
-                <a:schemeClr val="dk1"/>
-              </a:solidFill>
-              <a:latin typeface="Calibri"/>
-              <a:ea typeface="Calibri"/>
-              <a:cs typeface="Calibri"/>
-              <a:sym typeface="Calibri"/>
-            </a:endParaRPr>
-          </a:p>
-          <a:p>
-            <a:pPr marL="457200" lvl="0" indent="0" algn="l" rtl="0">
-              <a:lnSpc>
-                <a:spcPct val="115000"/>
-              </a:lnSpc>
-              <a:spcBef>
-                <a:spcPts val="200"/>
-              </a:spcBef>
-              <a:spcAft>
-                <a:spcPts val="0"/>
-              </a:spcAft>
-              <a:buNone/>
-            </a:pPr>
-            <a:r>
-              <a:rPr lang="en" sz="1350" dirty="0">
-                <a:solidFill>
-                  <a:schemeClr val="dk1"/>
-                </a:solidFill>
-                <a:latin typeface="Calibri"/>
-                <a:ea typeface="Calibri"/>
-                <a:cs typeface="Calibri"/>
-                <a:sym typeface="Calibri"/>
-              </a:rPr>
-              <a:t>a continuous severity measure,</a:t>
-            </a:r>
-            <a:endParaRPr sz="1350" dirty="0">
-              <a:solidFill>
-                <a:schemeClr val="dk1"/>
-              </a:solidFill>
-              <a:latin typeface="Calibri"/>
-              <a:ea typeface="Calibri"/>
-              <a:cs typeface="Calibri"/>
-              <a:sym typeface="Calibri"/>
-            </a:endParaRPr>
-          </a:p>
-          <a:p>
-            <a:pPr marL="457200" lvl="0" indent="0" algn="l" rtl="0">
-              <a:lnSpc>
-                <a:spcPct val="115000"/>
-              </a:lnSpc>
-              <a:spcBef>
-                <a:spcPts val="200"/>
-              </a:spcBef>
-              <a:spcAft>
-                <a:spcPts val="0"/>
-              </a:spcAft>
-              <a:buNone/>
-            </a:pPr>
-            <a:r>
-              <a:rPr lang="en" sz="1350" dirty="0">
-                <a:solidFill>
-                  <a:schemeClr val="dk1"/>
-                </a:solidFill>
-                <a:latin typeface="Calibri"/>
-                <a:ea typeface="Calibri"/>
-                <a:cs typeface="Calibri"/>
-                <a:sym typeface="Calibri"/>
-              </a:rPr>
-              <a:t>and a composite StressScore = P(bad\year) × E(severity).</a:t>
-            </a:r>
-            <a:endParaRPr sz="1350" dirty="0">
-              <a:solidFill>
-                <a:schemeClr val="dk1"/>
-              </a:solidFill>
-              <a:latin typeface="Calibri"/>
-              <a:ea typeface="Calibri"/>
-              <a:cs typeface="Calibri"/>
-              <a:sym typeface="Calibri"/>
-            </a:endParaRPr>
-          </a:p>
-          <a:p>
-            <a:pPr marL="457200" lvl="0" indent="0" algn="l" rtl="0">
-              <a:lnSpc>
-                <a:spcPct val="115000"/>
-              </a:lnSpc>
-              <a:spcBef>
-                <a:spcPts val="200"/>
-              </a:spcBef>
-              <a:spcAft>
-                <a:spcPts val="0"/>
-              </a:spcAft>
-              <a:buNone/>
-            </a:pPr>
-            <a:endParaRPr sz="1350" dirty="0">
-              <a:solidFill>
-                <a:schemeClr val="dk1"/>
-              </a:solidFill>
-              <a:latin typeface="Calibri"/>
-              <a:ea typeface="Calibri"/>
-              <a:cs typeface="Calibri"/>
-              <a:sym typeface="Calibri"/>
-            </a:endParaRPr>
-          </a:p>
-          <a:p>
-            <a:pPr marL="0" lvl="0" indent="0" algn="l" rtl="0">
-              <a:lnSpc>
-                <a:spcPct val="150000"/>
-              </a:lnSpc>
-              <a:spcBef>
-                <a:spcPts val="200"/>
-              </a:spcBef>
-              <a:spcAft>
-                <a:spcPts val="0"/>
-              </a:spcAft>
-              <a:buSzPts val="1100"/>
-              <a:buNone/>
-            </a:pPr>
-            <a:r>
-              <a:rPr lang="en" sz="1350" dirty="0">
-                <a:solidFill>
-                  <a:schemeClr val="dk1"/>
-                </a:solidFill>
-                <a:latin typeface="Calibri"/>
-                <a:ea typeface="Calibri"/>
-                <a:cs typeface="Calibri"/>
-                <a:sym typeface="Calibri"/>
-              </a:rPr>
-              <a:t>2.Visualization Outputs</a:t>
-            </a:r>
-            <a:endParaRPr sz="1350" dirty="0">
-              <a:solidFill>
-                <a:schemeClr val="dk1"/>
-              </a:solidFill>
-              <a:latin typeface="Calibri"/>
-              <a:ea typeface="Calibri"/>
-              <a:cs typeface="Calibri"/>
-              <a:sym typeface="Calibri"/>
-            </a:endParaRPr>
-          </a:p>
-          <a:p>
-            <a:pPr marL="457200" lvl="0" indent="0" algn="l" rtl="0">
-              <a:lnSpc>
-                <a:spcPct val="115000"/>
-              </a:lnSpc>
-              <a:spcBef>
-                <a:spcPts val="200"/>
-              </a:spcBef>
-              <a:spcAft>
-                <a:spcPts val="0"/>
-              </a:spcAft>
-              <a:buNone/>
-            </a:pPr>
-            <a:r>
-              <a:rPr lang="en" sz="1350" dirty="0">
-                <a:solidFill>
-                  <a:schemeClr val="dk1"/>
-                </a:solidFill>
-                <a:latin typeface="Calibri"/>
-                <a:ea typeface="Calibri"/>
-                <a:cs typeface="Calibri"/>
-                <a:sym typeface="Calibri"/>
-              </a:rPr>
-              <a:t>Static scatter: regulatory‑news negativity vs. ΔROA across state–years.</a:t>
-            </a:r>
-            <a:endParaRPr sz="1350" dirty="0">
-              <a:solidFill>
-                <a:schemeClr val="dk1"/>
-              </a:solidFill>
-              <a:latin typeface="Calibri"/>
-              <a:ea typeface="Calibri"/>
-              <a:cs typeface="Calibri"/>
-              <a:sym typeface="Calibri"/>
-            </a:endParaRPr>
-          </a:p>
-          <a:p>
-            <a:pPr marL="457200" lvl="0" indent="0" algn="l" rtl="0">
-              <a:lnSpc>
-                <a:spcPct val="115000"/>
-              </a:lnSpc>
-              <a:spcBef>
-                <a:spcPts val="200"/>
-              </a:spcBef>
-              <a:spcAft>
-                <a:spcPts val="200"/>
-              </a:spcAft>
-              <a:buNone/>
-            </a:pPr>
-            <a:r>
-              <a:rPr lang="en" sz="1350" dirty="0">
-                <a:solidFill>
-                  <a:schemeClr val="dk1"/>
-                </a:solidFill>
-                <a:latin typeface="Calibri"/>
-                <a:ea typeface="Calibri"/>
-                <a:cs typeface="Calibri"/>
+                <a:cs typeface="Times New Roman" panose="02020603050405020304" pitchFamily="18" charset="0"/>
                 <a:sym typeface="Calibri"/>
               </a:rPr>
               <a:t>Static map: state‑level StressScore</a:t>
             </a:r>
             <a:endParaRPr sz="1350" dirty="0">
-              <a:latin typeface="Calibri"/>
+              <a:latin typeface="Times New Roman" panose="02020603050405020304" pitchFamily="18" charset="0"/>
               <a:ea typeface="Calibri"/>
-              <a:cs typeface="Calibri"/>
+              <a:cs typeface="Times New Roman" panose="02020603050405020304" pitchFamily="18" charset="0"/>
               <a:sym typeface="Calibri"/>
             </a:endParaRPr>
           </a:p>
@@ -18767,56 +18502,6 @@
       </p:sp>
       <p:sp>
         <p:nvSpPr>
-          <p:cNvPr id="172" name="Google Shape;172;p28"/>
-          <p:cNvSpPr txBox="1"/>
-          <p:nvPr/>
-        </p:nvSpPr>
-        <p:spPr>
-          <a:xfrm>
-            <a:off x="182880" y="4887468"/>
-            <a:ext cx="6400800" cy="230700"/>
-          </a:xfrm>
-          <a:prstGeom prst="rect">
-            <a:avLst/>
-          </a:prstGeom>
-          <a:noFill/>
-          <a:ln>
-            <a:noFill/>
-          </a:ln>
-        </p:spPr>
-        <p:txBody>
-          <a:bodyPr spcFirstLastPara="1" wrap="square" lIns="91425" tIns="45700" rIns="91425" bIns="45700" anchor="t" anchorCtr="0">
-            <a:spAutoFit/>
-          </a:bodyPr>
-          <a:lstStyle/>
-          <a:p>
-            <a:pPr marL="0" marR="0" lvl="0" indent="0" algn="l" rtl="0">
-              <a:spcBef>
-                <a:spcPts val="0"/>
-              </a:spcBef>
-              <a:spcAft>
-                <a:spcPts val="0"/>
-              </a:spcAft>
-              <a:buNone/>
-            </a:pPr>
-            <a:r>
-              <a:rPr lang="en" sz="900" b="0" i="0" u="none" strike="noStrike" cap="none">
-                <a:solidFill>
-                  <a:srgbClr val="FFFFFF"/>
-                </a:solidFill>
-                <a:latin typeface="Calibri"/>
-                <a:ea typeface="Calibri"/>
-                <a:cs typeface="Calibri"/>
-                <a:sym typeface="Calibri"/>
-              </a:rPr>
-              <a:t>Oligarchic Versus Democratic Societies</a:t>
-            </a:r>
-            <a:endParaRPr/>
-          </a:p>
-        </p:txBody>
-      </p:sp>
-      <p:sp>
-        <p:nvSpPr>
           <p:cNvPr id="173" name="Google Shape;173;p28"/>
           <p:cNvSpPr txBox="1"/>
           <p:nvPr/>
@@ -18850,7 +18535,7 @@
               <a:buNone/>
             </a:pPr>
             <a:r>
-              <a:rPr lang="en" sz="900" b="0" i="0" u="none" strike="noStrike" cap="none">
+              <a:rPr lang="en" sz="900" dirty="0">
                 <a:solidFill>
                   <a:srgbClr val="FFFFFF"/>
                 </a:solidFill>
@@ -18859,9 +18544,33 @@
                 <a:cs typeface="Calibri"/>
                 <a:sym typeface="Calibri"/>
               </a:rPr>
-              <a:t>2 / 26</a:t>
+              <a:t>4</a:t>
             </a:r>
-            <a:endParaRPr/>
+            <a:r>
+              <a:rPr lang="en" sz="900" b="0" i="0" u="none" strike="noStrike" cap="none" dirty="0">
+                <a:solidFill>
+                  <a:srgbClr val="FFFFFF"/>
+                </a:solidFill>
+                <a:latin typeface="Calibri"/>
+                <a:ea typeface="Calibri"/>
+                <a:cs typeface="Calibri"/>
+                <a:sym typeface="Calibri"/>
+              </a:rPr>
+              <a:t> / </a:t>
+            </a:r>
+            <a:r>
+              <a:rPr lang="en" sz="900" dirty="0">
+                <a:solidFill>
+                  <a:srgbClr val="FFFFFF"/>
+                </a:solidFill>
+                <a:latin typeface="Calibri"/>
+                <a:ea typeface="Calibri"/>
+                <a:cs typeface="Calibri"/>
+                <a:sym typeface="Calibri"/>
+              </a:rPr>
+              <a:t>8</a:t>
+            </a:r>
+            <a:endParaRPr dirty="0"/>
           </a:p>
         </p:txBody>
       </p:sp>
@@ -18893,6 +18602,867 @@
           </a:ln>
         </p:spPr>
       </p:pic>
+      <p:sp>
+        <p:nvSpPr>
+          <p:cNvPr id="2" name="Google Shape;136;p25">
+            <a:extLst>
+              <a:ext uri="{FF2B5EF4-FFF2-40B4-BE49-F238E27FC236}">
+                <a16:creationId xmlns:a16="http://schemas.microsoft.com/office/drawing/2014/main" id="{7E22E3FB-0626-C33A-FC00-3F70C24D6A42}"/>
+              </a:ext>
+            </a:extLst>
+          </p:cNvPr>
+          <p:cNvSpPr txBox="1"/>
+          <p:nvPr/>
+        </p:nvSpPr>
+        <p:spPr>
+          <a:xfrm>
+            <a:off x="182880" y="4887468"/>
+            <a:ext cx="6400800" cy="230792"/>
+          </a:xfrm>
+          <a:prstGeom prst="rect">
+            <a:avLst/>
+          </a:prstGeom>
+          <a:noFill/>
+          <a:ln>
+            <a:noFill/>
+          </a:ln>
+        </p:spPr>
+        <p:txBody>
+          <a:bodyPr spcFirstLastPara="1" wrap="square" lIns="91425" tIns="45700" rIns="91425" bIns="45700" anchor="t" anchorCtr="0">
+            <a:spAutoFit/>
+          </a:bodyPr>
+          <a:lstStyle/>
+          <a:p>
+            <a:pPr lvl="0"/>
+            <a:r>
+              <a:rPr lang="en-US" sz="900" dirty="0">
+                <a:solidFill>
+                  <a:srgbClr val="FFFFFF"/>
+                </a:solidFill>
+                <a:latin typeface="Calibri"/>
+                <a:ea typeface="Calibri"/>
+                <a:cs typeface="Calibri"/>
+                <a:sym typeface="Calibri"/>
+              </a:rPr>
+              <a:t>Data Analytics and Visualization for Public Policy</a:t>
+            </a:r>
+            <a:endParaRPr dirty="0"/>
+          </a:p>
+        </p:txBody>
+      </p:sp>
+      <p:sp>
+        <p:nvSpPr>
+          <p:cNvPr id="32" name="文本框 31">
+            <a:extLst>
+              <a:ext uri="{FF2B5EF4-FFF2-40B4-BE49-F238E27FC236}">
+                <a16:creationId xmlns:a16="http://schemas.microsoft.com/office/drawing/2014/main" id="{15F30CC6-AF1E-9997-A142-FDADFB50A5D9}"/>
+              </a:ext>
+            </a:extLst>
+          </p:cNvPr>
+          <p:cNvSpPr txBox="1"/>
+          <p:nvPr/>
+        </p:nvSpPr>
+        <p:spPr>
+          <a:xfrm>
+            <a:off x="527019" y="1479585"/>
+            <a:ext cx="7662672" cy="307777"/>
+          </a:xfrm>
+          <a:prstGeom prst="rect">
+            <a:avLst/>
+          </a:prstGeom>
+          <a:solidFill>
+            <a:srgbClr val="92D050"/>
+          </a:solidFill>
+        </p:spPr>
+        <p:txBody>
+          <a:bodyPr wrap="square">
+            <a:spAutoFit/>
+          </a:bodyPr>
+          <a:lstStyle/>
+          <a:p>
+            <a:r>
+              <a:rPr lang="en-US" altLang="zh-CN"/>
+              <a:t>1. Merge </a:t>
+            </a:r>
+            <a:r>
+              <a:rPr lang="en-US" altLang="zh-CN" dirty="0"/>
+              <a:t>FDIC </a:t>
+            </a:r>
+            <a:r>
+              <a:rPr lang="en-US" altLang="zh-CN" b="1" i="1" dirty="0"/>
+              <a:t>state-year banking fundamentals </a:t>
+            </a:r>
+            <a:r>
+              <a:rPr lang="en-US" altLang="zh-CN" dirty="0"/>
+              <a:t>with</a:t>
+            </a:r>
+            <a:r>
+              <a:rPr lang="en-US" altLang="zh-CN" b="1" i="1" dirty="0"/>
+              <a:t> yearly regulatory-news sentiment</a:t>
+            </a:r>
+            <a:r>
+              <a:rPr lang="en-US" altLang="zh-CN" dirty="0"/>
+              <a:t>.</a:t>
+            </a:r>
+            <a:endParaRPr lang="zh-CN" altLang="en-US" dirty="0"/>
+          </a:p>
+        </p:txBody>
+      </p:sp>
+      <p:sp>
+        <p:nvSpPr>
+          <p:cNvPr id="34" name="文本框 33">
+            <a:extLst>
+              <a:ext uri="{FF2B5EF4-FFF2-40B4-BE49-F238E27FC236}">
+                <a16:creationId xmlns:a16="http://schemas.microsoft.com/office/drawing/2014/main" id="{0097601C-2C9B-4FC6-EF9F-5D07FEC31A83}"/>
+              </a:ext>
+            </a:extLst>
+          </p:cNvPr>
+          <p:cNvSpPr txBox="1"/>
+          <p:nvPr/>
+        </p:nvSpPr>
+        <p:spPr>
+          <a:xfrm>
+            <a:off x="527019" y="925070"/>
+            <a:ext cx="3364992" cy="246221"/>
+          </a:xfrm>
+          <a:prstGeom prst="rect">
+            <a:avLst/>
+          </a:prstGeom>
+          <a:noFill/>
+          <a:ln>
+            <a:solidFill>
+              <a:schemeClr val="tx1"/>
+            </a:solidFill>
+          </a:ln>
+        </p:spPr>
+        <p:txBody>
+          <a:bodyPr wrap="square">
+            <a:spAutoFit/>
+          </a:bodyPr>
+          <a:lstStyle/>
+          <a:p>
+            <a:r>
+              <a:rPr lang="en-US" altLang="zh-CN" sz="1000" b="1" dirty="0">
+                <a:latin typeface="Times New Roman" panose="02020603050405020304" pitchFamily="18" charset="0"/>
+                <a:cs typeface="Times New Roman" panose="02020603050405020304" pitchFamily="18" charset="0"/>
+              </a:rPr>
+              <a:t>FDIC </a:t>
+            </a:r>
+            <a:r>
+              <a:rPr lang="en-US" altLang="zh-CN" sz="1000" b="1" i="1" dirty="0">
+                <a:latin typeface="Times New Roman" panose="02020603050405020304" pitchFamily="18" charset="0"/>
+                <a:cs typeface="Times New Roman" panose="02020603050405020304" pitchFamily="18" charset="0"/>
+              </a:rPr>
+              <a:t>banking fundamentals data : ROA, ROE, Deposits</a:t>
+            </a:r>
+            <a:r>
+              <a:rPr lang="en-US" altLang="zh-CN" sz="1000" dirty="0"/>
+              <a:t> </a:t>
+            </a:r>
+            <a:r>
+              <a:rPr lang="en-US" altLang="zh-CN" sz="1000" b="1" i="1" dirty="0" err="1">
+                <a:latin typeface="Times New Roman" panose="02020603050405020304" pitchFamily="18" charset="0"/>
+                <a:cs typeface="Times New Roman" panose="02020603050405020304" pitchFamily="18" charset="0"/>
+              </a:rPr>
+              <a:t>etc</a:t>
+            </a:r>
+            <a:endParaRPr lang="zh-CN" altLang="en-US" sz="1000" dirty="0">
+              <a:latin typeface="Times New Roman" panose="02020603050405020304" pitchFamily="18" charset="0"/>
+              <a:cs typeface="Times New Roman" panose="02020603050405020304" pitchFamily="18" charset="0"/>
+            </a:endParaRPr>
+          </a:p>
+        </p:txBody>
+      </p:sp>
+      <p:sp>
+        <p:nvSpPr>
+          <p:cNvPr id="35" name="文本框 34">
+            <a:extLst>
+              <a:ext uri="{FF2B5EF4-FFF2-40B4-BE49-F238E27FC236}">
+                <a16:creationId xmlns:a16="http://schemas.microsoft.com/office/drawing/2014/main" id="{851C72EC-98FF-D4AF-B82C-343791DD1C2A}"/>
+              </a:ext>
+            </a:extLst>
+          </p:cNvPr>
+          <p:cNvSpPr txBox="1"/>
+          <p:nvPr/>
+        </p:nvSpPr>
+        <p:spPr>
+          <a:xfrm>
+            <a:off x="4199575" y="919832"/>
+            <a:ext cx="3932038" cy="246221"/>
+          </a:xfrm>
+          <a:prstGeom prst="rect">
+            <a:avLst/>
+          </a:prstGeom>
+          <a:noFill/>
+          <a:ln>
+            <a:solidFill>
+              <a:schemeClr val="tx1"/>
+            </a:solidFill>
+          </a:ln>
+        </p:spPr>
+        <p:txBody>
+          <a:bodyPr wrap="square">
+            <a:spAutoFit/>
+          </a:bodyPr>
+          <a:lstStyle/>
+          <a:p>
+            <a:r>
+              <a:rPr lang="en-US" altLang="zh-CN" sz="1000" dirty="0">
+                <a:latin typeface="Times New Roman" panose="02020603050405020304" pitchFamily="18" charset="0"/>
+                <a:cs typeface="Times New Roman" panose="02020603050405020304" pitchFamily="18" charset="0"/>
+              </a:rPr>
+              <a:t>negative regulatory/banking regulation news </a:t>
+            </a:r>
+            <a:r>
+              <a:rPr lang="zh-CN" altLang="en-US" sz="1000" dirty="0">
+                <a:latin typeface="Times New Roman" panose="02020603050405020304" pitchFamily="18" charset="0"/>
+                <a:cs typeface="Times New Roman" panose="02020603050405020304" pitchFamily="18" charset="0"/>
+              </a:rPr>
+              <a:t>⮕</a:t>
+            </a:r>
+            <a:r>
+              <a:rPr lang="en-US" altLang="zh-CN" sz="1000" dirty="0">
+                <a:latin typeface="Times New Roman" panose="02020603050405020304" pitchFamily="18" charset="0"/>
+                <a:cs typeface="Times New Roman" panose="02020603050405020304" pitchFamily="18" charset="0"/>
+              </a:rPr>
+              <a:t>NLP</a:t>
+            </a:r>
+            <a:r>
+              <a:rPr lang="zh-CN" altLang="en-US" sz="1000" dirty="0">
+                <a:latin typeface="Times New Roman" panose="02020603050405020304" pitchFamily="18" charset="0"/>
+                <a:cs typeface="Times New Roman" panose="02020603050405020304" pitchFamily="18" charset="0"/>
+              </a:rPr>
+              <a:t>⮕</a:t>
+            </a:r>
+            <a:r>
+              <a:rPr lang="en-US" altLang="zh-CN" sz="1000" dirty="0">
+                <a:latin typeface="Times New Roman" panose="02020603050405020304" pitchFamily="18" charset="0"/>
+                <a:cs typeface="Times New Roman" panose="02020603050405020304" pitchFamily="18" charset="0"/>
+              </a:rPr>
+              <a:t>sentiment index</a:t>
+            </a:r>
+            <a:endParaRPr lang="zh-CN" altLang="en-US" sz="1000" dirty="0">
+              <a:latin typeface="Times New Roman" panose="02020603050405020304" pitchFamily="18" charset="0"/>
+              <a:cs typeface="Times New Roman" panose="02020603050405020304" pitchFamily="18" charset="0"/>
+            </a:endParaRPr>
+          </a:p>
+        </p:txBody>
+      </p:sp>
+      <p:sp>
+        <p:nvSpPr>
+          <p:cNvPr id="37" name="右大括号 36">
+            <a:extLst>
+              <a:ext uri="{FF2B5EF4-FFF2-40B4-BE49-F238E27FC236}">
+                <a16:creationId xmlns:a16="http://schemas.microsoft.com/office/drawing/2014/main" id="{B1D663AC-855B-6B45-74E0-AF42EA47422D}"/>
+              </a:ext>
+            </a:extLst>
+          </p:cNvPr>
+          <p:cNvSpPr/>
+          <p:nvPr/>
+        </p:nvSpPr>
+        <p:spPr>
+          <a:xfrm rot="5400000">
+            <a:off x="3907536" y="538930"/>
+            <a:ext cx="298704" cy="1676569"/>
+          </a:xfrm>
+          <a:prstGeom prst="rightBrace">
+            <a:avLst/>
+          </a:prstGeom>
+        </p:spPr>
+        <p:style>
+          <a:lnRef idx="1">
+            <a:schemeClr val="accent1"/>
+          </a:lnRef>
+          <a:fillRef idx="0">
+            <a:schemeClr val="accent1"/>
+          </a:fillRef>
+          <a:effectRef idx="0">
+            <a:schemeClr val="accent1"/>
+          </a:effectRef>
+          <a:fontRef idx="minor">
+            <a:schemeClr val="tx1"/>
+          </a:fontRef>
+        </p:style>
+        <p:txBody>
+          <a:bodyPr rtlCol="0" anchor="ctr"/>
+          <a:lstStyle/>
+          <a:p>
+            <a:pPr algn="ctr"/>
+            <a:endParaRPr lang="zh-CN" altLang="en-US"/>
+          </a:p>
+        </p:txBody>
+      </p:sp>
+      <p:sp>
+        <p:nvSpPr>
+          <p:cNvPr id="39" name="文本框 38">
+            <a:extLst>
+              <a:ext uri="{FF2B5EF4-FFF2-40B4-BE49-F238E27FC236}">
+                <a16:creationId xmlns:a16="http://schemas.microsoft.com/office/drawing/2014/main" id="{0A9CC273-0595-AB1D-C5EC-2FC0D57A9ED0}"/>
+              </a:ext>
+            </a:extLst>
+          </p:cNvPr>
+          <p:cNvSpPr txBox="1"/>
+          <p:nvPr/>
+        </p:nvSpPr>
+        <p:spPr>
+          <a:xfrm>
+            <a:off x="615411" y="2044064"/>
+            <a:ext cx="3276600" cy="400110"/>
+          </a:xfrm>
+          <a:prstGeom prst="rect">
+            <a:avLst/>
+          </a:prstGeom>
+          <a:noFill/>
+        </p:spPr>
+        <p:txBody>
+          <a:bodyPr wrap="square">
+            <a:spAutoFit/>
+          </a:bodyPr>
+          <a:lstStyle/>
+          <a:p>
+            <a:pPr>
+              <a:buNone/>
+            </a:pPr>
+            <a:r>
+              <a:rPr lang="en-US" altLang="zh-CN" sz="1000" b="1" dirty="0">
+                <a:latin typeface="Times New Roman" panose="02020603050405020304" pitchFamily="18" charset="0"/>
+                <a:cs typeface="Times New Roman" panose="02020603050405020304" pitchFamily="18" charset="0"/>
+              </a:rPr>
+              <a:t>❶ ΔROA (Profitability Change)</a:t>
+            </a:r>
+          </a:p>
+          <a:p>
+            <a:pPr>
+              <a:buNone/>
+            </a:pPr>
+            <a:r>
+              <a:rPr lang="en-US" altLang="zh-CN" sz="1000" b="1" dirty="0">
+                <a:latin typeface="Times New Roman" panose="02020603050405020304" pitchFamily="18" charset="0"/>
+                <a:cs typeface="Times New Roman" panose="02020603050405020304" pitchFamily="18" charset="0"/>
+              </a:rPr>
+              <a:t>Change in return on assets for state s from year t to t+1</a:t>
+            </a:r>
+            <a:endParaRPr lang="en-US" altLang="zh-CN" sz="1000" dirty="0">
+              <a:latin typeface="Times New Roman" panose="02020603050405020304" pitchFamily="18" charset="0"/>
+              <a:cs typeface="Times New Roman" panose="02020603050405020304" pitchFamily="18" charset="0"/>
+            </a:endParaRPr>
+          </a:p>
+        </p:txBody>
+      </p:sp>
+      <p:pic>
+        <p:nvPicPr>
+          <p:cNvPr id="41" name="图片 40">
+            <a:extLst>
+              <a:ext uri="{FF2B5EF4-FFF2-40B4-BE49-F238E27FC236}">
+                <a16:creationId xmlns:a16="http://schemas.microsoft.com/office/drawing/2014/main" id="{F8D47400-78DF-EC76-DCFB-F1560C96927C}"/>
+              </a:ext>
+            </a:extLst>
+          </p:cNvPr>
+          <p:cNvPicPr>
+            <a:picLocks noChangeAspect="1"/>
+          </p:cNvPicPr>
+          <p:nvPr/>
+        </p:nvPicPr>
+        <p:blipFill>
+          <a:blip r:embed="rId5"/>
+          <a:stretch>
+            <a:fillRect/>
+          </a:stretch>
+        </p:blipFill>
+        <p:spPr>
+          <a:xfrm>
+            <a:off x="713232" y="2377603"/>
+            <a:ext cx="2335650" cy="266626"/>
+          </a:xfrm>
+          <a:prstGeom prst="rect">
+            <a:avLst/>
+          </a:prstGeom>
+        </p:spPr>
+      </p:pic>
+      <p:sp>
+        <p:nvSpPr>
+          <p:cNvPr id="43" name="文本框 42">
+            <a:extLst>
+              <a:ext uri="{FF2B5EF4-FFF2-40B4-BE49-F238E27FC236}">
+                <a16:creationId xmlns:a16="http://schemas.microsoft.com/office/drawing/2014/main" id="{42063683-598A-135A-21E6-968EDB0D269B}"/>
+              </a:ext>
+            </a:extLst>
+          </p:cNvPr>
+          <p:cNvSpPr txBox="1"/>
+          <p:nvPr/>
+        </p:nvSpPr>
+        <p:spPr>
+          <a:xfrm>
+            <a:off x="4468368" y="2051664"/>
+            <a:ext cx="4614672" cy="553998"/>
+          </a:xfrm>
+          <a:prstGeom prst="rect">
+            <a:avLst/>
+          </a:prstGeom>
+          <a:noFill/>
+        </p:spPr>
+        <p:txBody>
+          <a:bodyPr wrap="square">
+            <a:spAutoFit/>
+          </a:bodyPr>
+          <a:lstStyle/>
+          <a:p>
+            <a:pPr>
+              <a:buNone/>
+            </a:pPr>
+            <a:r>
+              <a:rPr lang="en-US" altLang="zh-CN" sz="1000" b="1" dirty="0">
+                <a:latin typeface="Times New Roman" panose="02020603050405020304" pitchFamily="18" charset="0"/>
+                <a:cs typeface="Times New Roman" panose="02020603050405020304" pitchFamily="18" charset="0"/>
+              </a:rPr>
+              <a:t>❷ </a:t>
+            </a:r>
+            <a:r>
+              <a:rPr lang="en-US" altLang="zh-CN" sz="1000" b="1" dirty="0" err="1">
+                <a:latin typeface="Times New Roman" panose="02020603050405020304" pitchFamily="18" charset="0"/>
+                <a:cs typeface="Times New Roman" panose="02020603050405020304" pitchFamily="18" charset="0"/>
+              </a:rPr>
+              <a:t>bad_year</a:t>
+            </a:r>
+            <a:r>
+              <a:rPr lang="en-US" altLang="zh-CN" sz="1000" b="1" dirty="0">
+                <a:latin typeface="Times New Roman" panose="02020603050405020304" pitchFamily="18" charset="0"/>
+                <a:cs typeface="Times New Roman" panose="02020603050405020304" pitchFamily="18" charset="0"/>
+              </a:rPr>
+              <a:t> (Stress Indicator)</a:t>
+            </a:r>
+          </a:p>
+          <a:p>
+            <a:pPr>
+              <a:buNone/>
+            </a:pPr>
+            <a:r>
+              <a:rPr lang="en-US" altLang="zh-CN" sz="1000" b="1" dirty="0">
+                <a:latin typeface="Times New Roman" panose="02020603050405020304" pitchFamily="18" charset="0"/>
+                <a:cs typeface="Times New Roman" panose="02020603050405020304" pitchFamily="18" charset="0"/>
+              </a:rPr>
+              <a:t>Binary indicator equal to 1 if ΔROA is unusually low</a:t>
+            </a:r>
+          </a:p>
+          <a:p>
+            <a:pPr>
+              <a:buNone/>
+            </a:pPr>
+            <a:r>
+              <a:rPr lang="en-US" altLang="zh-CN" sz="1000" b="1" dirty="0">
+                <a:latin typeface="Times New Roman" panose="02020603050405020304" pitchFamily="18" charset="0"/>
+                <a:cs typeface="Times New Roman" panose="02020603050405020304" pitchFamily="18" charset="0"/>
+              </a:rPr>
+              <a:t>If </a:t>
+            </a:r>
+            <a:r>
+              <a:rPr lang="el-GR" altLang="zh-CN" sz="1000" dirty="0">
+                <a:latin typeface="Times New Roman" panose="02020603050405020304" pitchFamily="18" charset="0"/>
+                <a:cs typeface="Times New Roman" panose="02020603050405020304" pitchFamily="18" charset="0"/>
+              </a:rPr>
+              <a:t>Δ</a:t>
+            </a:r>
+            <a:r>
+              <a:rPr lang="en-US" altLang="zh-CN" sz="1000" dirty="0">
+                <a:latin typeface="Times New Roman" panose="02020603050405020304" pitchFamily="18" charset="0"/>
+                <a:cs typeface="Times New Roman" panose="02020603050405020304" pitchFamily="18" charset="0"/>
+              </a:rPr>
+              <a:t>ROA very</a:t>
+            </a:r>
+            <a:r>
+              <a:rPr lang="zh-CN" altLang="en-US" sz="1000" dirty="0">
+                <a:latin typeface="Times New Roman" panose="02020603050405020304" pitchFamily="18" charset="0"/>
+                <a:cs typeface="Times New Roman" panose="02020603050405020304" pitchFamily="18" charset="0"/>
+              </a:rPr>
+              <a:t> </a:t>
+            </a:r>
+            <a:r>
+              <a:rPr lang="en-US" altLang="zh-CN" sz="1000" dirty="0">
+                <a:latin typeface="Times New Roman" panose="02020603050405020304" pitchFamily="18" charset="0"/>
+                <a:cs typeface="Times New Roman" panose="02020603050405020304" pitchFamily="18" charset="0"/>
+              </a:rPr>
+              <a:t>low, </a:t>
+            </a:r>
+            <a:r>
+              <a:rPr lang="en-US" altLang="zh-CN" sz="1000" dirty="0" err="1">
+                <a:latin typeface="Times New Roman" panose="02020603050405020304" pitchFamily="18" charset="0"/>
+                <a:cs typeface="Times New Roman" panose="02020603050405020304" pitchFamily="18" charset="0"/>
+              </a:rPr>
+              <a:t>bad_year</a:t>
+            </a:r>
+            <a:r>
+              <a:rPr lang="en-US" altLang="zh-CN" sz="1000" dirty="0">
+                <a:latin typeface="Times New Roman" panose="02020603050405020304" pitchFamily="18" charset="0"/>
+                <a:cs typeface="Times New Roman" panose="02020603050405020304" pitchFamily="18" charset="0"/>
+              </a:rPr>
+              <a:t> = 1</a:t>
+            </a:r>
+          </a:p>
+        </p:txBody>
+      </p:sp>
+      <p:sp>
+        <p:nvSpPr>
+          <p:cNvPr id="45" name="文本框 44">
+            <a:extLst>
+              <a:ext uri="{FF2B5EF4-FFF2-40B4-BE49-F238E27FC236}">
+                <a16:creationId xmlns:a16="http://schemas.microsoft.com/office/drawing/2014/main" id="{9CFCFDD3-FCE2-3B46-2A60-86AC002FE219}"/>
+              </a:ext>
+            </a:extLst>
+          </p:cNvPr>
+          <p:cNvSpPr txBox="1"/>
+          <p:nvPr/>
+        </p:nvSpPr>
+        <p:spPr>
+          <a:xfrm>
+            <a:off x="648796" y="2963302"/>
+            <a:ext cx="3121437" cy="553998"/>
+          </a:xfrm>
+          <a:prstGeom prst="rect">
+            <a:avLst/>
+          </a:prstGeom>
+          <a:noFill/>
+        </p:spPr>
+        <p:txBody>
+          <a:bodyPr wrap="square">
+            <a:spAutoFit/>
+          </a:bodyPr>
+          <a:lstStyle/>
+          <a:p>
+            <a:pPr>
+              <a:buNone/>
+            </a:pPr>
+            <a:r>
+              <a:rPr lang="en-US" altLang="zh-CN" sz="1000" b="1" dirty="0">
+                <a:latin typeface="Times New Roman" panose="02020603050405020304" pitchFamily="18" charset="0"/>
+                <a:cs typeface="Times New Roman" panose="02020603050405020304" pitchFamily="18" charset="0"/>
+              </a:rPr>
+              <a:t>❸ severity (Magnitude of Deterioration)</a:t>
+            </a:r>
+          </a:p>
+          <a:p>
+            <a:pPr>
+              <a:buNone/>
+            </a:pPr>
+            <a:r>
+              <a:rPr lang="en-US" altLang="zh-CN" sz="1000" b="1" dirty="0">
+                <a:latin typeface="Times New Roman" panose="02020603050405020304" pitchFamily="18" charset="0"/>
+                <a:cs typeface="Times New Roman" panose="02020603050405020304" pitchFamily="18" charset="0"/>
+              </a:rPr>
+              <a:t>Continuous measure capturing how severe the profitability decline is (HOW bad it was)</a:t>
+            </a:r>
+            <a:endParaRPr lang="en-US" altLang="zh-CN" sz="1000" dirty="0">
+              <a:latin typeface="Times New Roman" panose="02020603050405020304" pitchFamily="18" charset="0"/>
+              <a:cs typeface="Times New Roman" panose="02020603050405020304" pitchFamily="18" charset="0"/>
+            </a:endParaRPr>
+          </a:p>
+        </p:txBody>
+      </p:sp>
+      <p:sp>
+        <p:nvSpPr>
+          <p:cNvPr id="49" name="文本框 48">
+            <a:extLst>
+              <a:ext uri="{FF2B5EF4-FFF2-40B4-BE49-F238E27FC236}">
+                <a16:creationId xmlns:a16="http://schemas.microsoft.com/office/drawing/2014/main" id="{925FF842-8FB7-EAE1-C53D-84FC25DD9833}"/>
+              </a:ext>
+            </a:extLst>
+          </p:cNvPr>
+          <p:cNvSpPr txBox="1"/>
+          <p:nvPr/>
+        </p:nvSpPr>
+        <p:spPr>
+          <a:xfrm>
+            <a:off x="4468368" y="2963302"/>
+            <a:ext cx="4614672" cy="400110"/>
+          </a:xfrm>
+          <a:prstGeom prst="rect">
+            <a:avLst/>
+          </a:prstGeom>
+          <a:noFill/>
+        </p:spPr>
+        <p:txBody>
+          <a:bodyPr wrap="square">
+            <a:spAutoFit/>
+          </a:bodyPr>
+          <a:lstStyle/>
+          <a:p>
+            <a:r>
+              <a:rPr lang="en-US" altLang="zh-CN" sz="1000" dirty="0">
+                <a:latin typeface="Times New Roman" panose="02020603050405020304" pitchFamily="18" charset="0"/>
+                <a:cs typeface="Times New Roman" panose="02020603050405020304" pitchFamily="18" charset="0"/>
+              </a:rPr>
+              <a:t>❹ </a:t>
+            </a:r>
+            <a:r>
+              <a:rPr lang="en-US" altLang="zh-CN" sz="1000" dirty="0" err="1">
+                <a:latin typeface="Times New Roman" panose="02020603050405020304" pitchFamily="18" charset="0"/>
+                <a:cs typeface="Times New Roman" panose="02020603050405020304" pitchFamily="18" charset="0"/>
+              </a:rPr>
+              <a:t>StressScore</a:t>
+            </a:r>
+            <a:r>
+              <a:rPr lang="en-US" altLang="zh-CN" sz="1000" dirty="0">
+                <a:latin typeface="Times New Roman" panose="02020603050405020304" pitchFamily="18" charset="0"/>
+                <a:cs typeface="Times New Roman" panose="02020603050405020304" pitchFamily="18" charset="0"/>
+              </a:rPr>
+              <a:t> (Composite Stress Index)</a:t>
+            </a:r>
+          </a:p>
+          <a:p>
+            <a:r>
+              <a:rPr lang="en-US" altLang="zh-CN" sz="1000" b="1" dirty="0" err="1">
+                <a:latin typeface="Times New Roman" panose="02020603050405020304" pitchFamily="18" charset="0"/>
+                <a:cs typeface="Times New Roman" panose="02020603050405020304" pitchFamily="18" charset="0"/>
+              </a:rPr>
+              <a:t>StressScore</a:t>
+            </a:r>
+            <a:r>
+              <a:rPr lang="en-US" altLang="zh-CN" sz="1000" b="1" dirty="0">
+                <a:latin typeface="Times New Roman" panose="02020603050405020304" pitchFamily="18" charset="0"/>
+                <a:cs typeface="Times New Roman" panose="02020603050405020304" pitchFamily="18" charset="0"/>
+              </a:rPr>
+              <a:t> = Probability of Distress × Severity of Distress</a:t>
+            </a:r>
+            <a:endParaRPr lang="zh-CN" altLang="en-US" sz="1000" dirty="0">
+              <a:latin typeface="Times New Roman" panose="02020603050405020304" pitchFamily="18" charset="0"/>
+              <a:cs typeface="Times New Roman" panose="02020603050405020304" pitchFamily="18" charset="0"/>
+            </a:endParaRPr>
+          </a:p>
+        </p:txBody>
+      </p:sp>
+      <p:pic>
+        <p:nvPicPr>
+          <p:cNvPr id="51" name="图片 50">
+            <a:extLst>
+              <a:ext uri="{FF2B5EF4-FFF2-40B4-BE49-F238E27FC236}">
+                <a16:creationId xmlns:a16="http://schemas.microsoft.com/office/drawing/2014/main" id="{F56FC857-6F06-9141-5554-77E433D5C3E3}"/>
+              </a:ext>
+            </a:extLst>
+          </p:cNvPr>
+          <p:cNvPicPr>
+            <a:picLocks noChangeAspect="1"/>
+          </p:cNvPicPr>
+          <p:nvPr/>
+        </p:nvPicPr>
+        <p:blipFill>
+          <a:blip r:embed="rId6"/>
+          <a:stretch>
+            <a:fillRect/>
+          </a:stretch>
+        </p:blipFill>
+        <p:spPr>
+          <a:xfrm>
+            <a:off x="4517136" y="3309245"/>
+            <a:ext cx="2962656" cy="310226"/>
+          </a:xfrm>
+          <a:prstGeom prst="rect">
+            <a:avLst/>
+          </a:prstGeom>
+        </p:spPr>
+      </p:pic>
+      <p:sp>
+        <p:nvSpPr>
+          <p:cNvPr id="52" name="矩形: 圆角 51">
+            <a:extLst>
+              <a:ext uri="{FF2B5EF4-FFF2-40B4-BE49-F238E27FC236}">
+                <a16:creationId xmlns:a16="http://schemas.microsoft.com/office/drawing/2014/main" id="{4153D885-1409-19FC-8999-955133168AA9}"/>
+              </a:ext>
+            </a:extLst>
+          </p:cNvPr>
+          <p:cNvSpPr/>
+          <p:nvPr/>
+        </p:nvSpPr>
+        <p:spPr>
+          <a:xfrm>
+            <a:off x="527019" y="1962912"/>
+            <a:ext cx="3364992" cy="821694"/>
+          </a:xfrm>
+          <a:prstGeom prst="roundRect">
+            <a:avLst/>
+          </a:prstGeom>
+          <a:solidFill>
+            <a:schemeClr val="accent1">
+              <a:alpha val="30000"/>
+            </a:schemeClr>
+          </a:solidFill>
+        </p:spPr>
+        <p:style>
+          <a:lnRef idx="2">
+            <a:schemeClr val="accent1">
+              <a:shade val="15000"/>
+            </a:schemeClr>
+          </a:lnRef>
+          <a:fillRef idx="1">
+            <a:schemeClr val="accent1"/>
+          </a:fillRef>
+          <a:effectRef idx="0">
+            <a:schemeClr val="accent1"/>
+          </a:effectRef>
+          <a:fontRef idx="minor">
+            <a:schemeClr val="lt1"/>
+          </a:fontRef>
+        </p:style>
+        <p:txBody>
+          <a:bodyPr rtlCol="0" anchor="ctr"/>
+          <a:lstStyle/>
+          <a:p>
+            <a:pPr algn="ctr"/>
+            <a:endParaRPr lang="zh-CN" altLang="en-US"/>
+          </a:p>
+        </p:txBody>
+      </p:sp>
+      <p:sp>
+        <p:nvSpPr>
+          <p:cNvPr id="53" name="矩形: 圆角 52">
+            <a:extLst>
+              <a:ext uri="{FF2B5EF4-FFF2-40B4-BE49-F238E27FC236}">
+                <a16:creationId xmlns:a16="http://schemas.microsoft.com/office/drawing/2014/main" id="{B4D24CE6-4090-0CC2-C84F-DB8CBC5D5FF0}"/>
+              </a:ext>
+            </a:extLst>
+          </p:cNvPr>
+          <p:cNvSpPr/>
+          <p:nvPr/>
+        </p:nvSpPr>
+        <p:spPr>
+          <a:xfrm>
+            <a:off x="4358355" y="1962912"/>
+            <a:ext cx="3364992" cy="821694"/>
+          </a:xfrm>
+          <a:prstGeom prst="roundRect">
+            <a:avLst/>
+          </a:prstGeom>
+          <a:solidFill>
+            <a:schemeClr val="accent1">
+              <a:alpha val="30000"/>
+            </a:schemeClr>
+          </a:solidFill>
+        </p:spPr>
+        <p:style>
+          <a:lnRef idx="2">
+            <a:schemeClr val="accent1">
+              <a:shade val="15000"/>
+            </a:schemeClr>
+          </a:lnRef>
+          <a:fillRef idx="1">
+            <a:schemeClr val="accent1"/>
+          </a:fillRef>
+          <a:effectRef idx="0">
+            <a:schemeClr val="accent1"/>
+          </a:effectRef>
+          <a:fontRef idx="minor">
+            <a:schemeClr val="lt1"/>
+          </a:fontRef>
+        </p:style>
+        <p:txBody>
+          <a:bodyPr rtlCol="0" anchor="ctr"/>
+          <a:lstStyle/>
+          <a:p>
+            <a:pPr algn="ctr"/>
+            <a:endParaRPr lang="zh-CN" altLang="en-US"/>
+          </a:p>
+        </p:txBody>
+      </p:sp>
+      <p:sp>
+        <p:nvSpPr>
+          <p:cNvPr id="54" name="矩形: 圆角 53">
+            <a:extLst>
+              <a:ext uri="{FF2B5EF4-FFF2-40B4-BE49-F238E27FC236}">
+                <a16:creationId xmlns:a16="http://schemas.microsoft.com/office/drawing/2014/main" id="{E0386CB9-5585-C32E-D13A-D7BEF7E05FAD}"/>
+              </a:ext>
+            </a:extLst>
+          </p:cNvPr>
+          <p:cNvSpPr/>
+          <p:nvPr/>
+        </p:nvSpPr>
+        <p:spPr>
+          <a:xfrm>
+            <a:off x="527019" y="2952565"/>
+            <a:ext cx="3364992" cy="821694"/>
+          </a:xfrm>
+          <a:prstGeom prst="roundRect">
+            <a:avLst/>
+          </a:prstGeom>
+          <a:solidFill>
+            <a:schemeClr val="accent1">
+              <a:alpha val="30000"/>
+            </a:schemeClr>
+          </a:solidFill>
+        </p:spPr>
+        <p:style>
+          <a:lnRef idx="2">
+            <a:schemeClr val="accent1">
+              <a:shade val="15000"/>
+            </a:schemeClr>
+          </a:lnRef>
+          <a:fillRef idx="1">
+            <a:schemeClr val="accent1"/>
+          </a:fillRef>
+          <a:effectRef idx="0">
+            <a:schemeClr val="accent1"/>
+          </a:effectRef>
+          <a:fontRef idx="minor">
+            <a:schemeClr val="lt1"/>
+          </a:fontRef>
+        </p:style>
+        <p:txBody>
+          <a:bodyPr rtlCol="0" anchor="ctr"/>
+          <a:lstStyle/>
+          <a:p>
+            <a:pPr algn="ctr"/>
+            <a:endParaRPr lang="zh-CN" altLang="en-US"/>
+          </a:p>
+        </p:txBody>
+      </p:sp>
+      <p:sp>
+        <p:nvSpPr>
+          <p:cNvPr id="55" name="矩形: 圆角 54">
+            <a:extLst>
+              <a:ext uri="{FF2B5EF4-FFF2-40B4-BE49-F238E27FC236}">
+                <a16:creationId xmlns:a16="http://schemas.microsoft.com/office/drawing/2014/main" id="{0BF33C4B-1F9C-F9BA-10EE-08F754178C59}"/>
+              </a:ext>
+            </a:extLst>
+          </p:cNvPr>
+          <p:cNvSpPr/>
+          <p:nvPr/>
+        </p:nvSpPr>
+        <p:spPr>
+          <a:xfrm>
+            <a:off x="4358355" y="2922087"/>
+            <a:ext cx="3364992" cy="821694"/>
+          </a:xfrm>
+          <a:prstGeom prst="roundRect">
+            <a:avLst/>
+          </a:prstGeom>
+          <a:solidFill>
+            <a:schemeClr val="accent1">
+              <a:alpha val="30000"/>
+            </a:schemeClr>
+          </a:solidFill>
+        </p:spPr>
+        <p:style>
+          <a:lnRef idx="2">
+            <a:schemeClr val="accent1">
+              <a:shade val="15000"/>
+            </a:schemeClr>
+          </a:lnRef>
+          <a:fillRef idx="1">
+            <a:schemeClr val="accent1"/>
+          </a:fillRef>
+          <a:effectRef idx="0">
+            <a:schemeClr val="accent1"/>
+          </a:effectRef>
+          <a:fontRef idx="minor">
+            <a:schemeClr val="lt1"/>
+          </a:fontRef>
+        </p:style>
+        <p:txBody>
+          <a:bodyPr rtlCol="0" anchor="ctr"/>
+          <a:lstStyle/>
+          <a:p>
+            <a:pPr algn="ctr"/>
+            <a:endParaRPr lang="zh-CN" altLang="en-US"/>
+          </a:p>
+        </p:txBody>
+      </p:sp>
     </p:spTree>
   </p:cSld>
   <p:clrMapOvr>
@@ -19249,56 +19819,6 @@
       </p:sp>
       <p:sp>
         <p:nvSpPr>
-          <p:cNvPr id="184" name="Google Shape;184;p29"/>
-          <p:cNvSpPr txBox="1"/>
-          <p:nvPr/>
-        </p:nvSpPr>
-        <p:spPr>
-          <a:xfrm>
-            <a:off x="182880" y="4887468"/>
-            <a:ext cx="6400800" cy="256032"/>
-          </a:xfrm>
-          <a:prstGeom prst="rect">
-            <a:avLst/>
-          </a:prstGeom>
-          <a:noFill/>
-          <a:ln>
-            <a:noFill/>
-          </a:ln>
-        </p:spPr>
-        <p:txBody>
-          <a:bodyPr spcFirstLastPara="1" wrap="square" lIns="91425" tIns="45700" rIns="91425" bIns="45700" anchor="t" anchorCtr="0">
-            <a:spAutoFit/>
-          </a:bodyPr>
-          <a:lstStyle/>
-          <a:p>
-            <a:pPr marL="0" marR="0" lvl="0" indent="0" algn="l" rtl="0">
-              <a:spcBef>
-                <a:spcPts val="0"/>
-              </a:spcBef>
-              <a:spcAft>
-                <a:spcPts val="0"/>
-              </a:spcAft>
-              <a:buNone/>
-            </a:pPr>
-            <a:r>
-              <a:rPr lang="en" sz="900" b="0" i="0" u="none" strike="noStrike" cap="none">
-                <a:solidFill>
-                  <a:srgbClr val="FFFFFF"/>
-                </a:solidFill>
-                <a:latin typeface="Calibri"/>
-                <a:ea typeface="Calibri"/>
-                <a:cs typeface="Calibri"/>
-                <a:sym typeface="Calibri"/>
-              </a:rPr>
-              <a:t>Oligarchic Versus Democratic Societies</a:t>
-            </a:r>
-            <a:endParaRPr/>
-          </a:p>
-        </p:txBody>
-      </p:sp>
-      <p:sp>
-        <p:nvSpPr>
           <p:cNvPr id="185" name="Google Shape;185;p29"/>
           <p:cNvSpPr txBox="1"/>
           <p:nvPr/>
@@ -19306,7 +19826,7 @@
         <p:spPr>
           <a:xfrm>
             <a:off x="6583680" y="4887468"/>
-            <a:ext cx="2377440" cy="256032"/>
+            <a:ext cx="2377440" cy="230792"/>
           </a:xfrm>
           <a:prstGeom prst="rect">
             <a:avLst/>
@@ -19332,7 +19852,7 @@
               <a:buNone/>
             </a:pPr>
             <a:r>
-              <a:rPr lang="en" sz="900" b="0" i="0" u="none" strike="noStrike" cap="none">
+              <a:rPr lang="en" sz="900" dirty="0">
                 <a:solidFill>
                   <a:srgbClr val="FFFFFF"/>
                 </a:solidFill>
@@ -19341,9 +19861,33 @@
                 <a:cs typeface="Calibri"/>
                 <a:sym typeface="Calibri"/>
               </a:rPr>
-              <a:t>3 / 26</a:t>
+              <a:t>5</a:t>
             </a:r>
-            <a:endParaRPr/>
+            <a:r>
+              <a:rPr lang="en" sz="900" b="0" i="0" u="none" strike="noStrike" cap="none" dirty="0">
+                <a:solidFill>
+                  <a:srgbClr val="FFFFFF"/>
+                </a:solidFill>
+                <a:latin typeface="Calibri"/>
+                <a:ea typeface="Calibri"/>
+                <a:cs typeface="Calibri"/>
+                <a:sym typeface="Calibri"/>
+              </a:rPr>
+              <a:t> / </a:t>
+            </a:r>
+            <a:r>
+              <a:rPr lang="en" sz="900" dirty="0">
+                <a:solidFill>
+                  <a:srgbClr val="FFFFFF"/>
+                </a:solidFill>
+                <a:latin typeface="Calibri"/>
+                <a:ea typeface="Calibri"/>
+                <a:cs typeface="Calibri"/>
+                <a:sym typeface="Calibri"/>
+              </a:rPr>
+              <a:t>8</a:t>
+            </a:r>
+            <a:endParaRPr dirty="0"/>
           </a:p>
         </p:txBody>
       </p:sp>
@@ -20374,6 +20918,54 @@
           </a:p>
         </p:txBody>
       </p:sp>
+      <p:sp>
+        <p:nvSpPr>
+          <p:cNvPr id="15" name="Google Shape;136;p25">
+            <a:extLst>
+              <a:ext uri="{FF2B5EF4-FFF2-40B4-BE49-F238E27FC236}">
+                <a16:creationId xmlns:a16="http://schemas.microsoft.com/office/drawing/2014/main" id="{0D4F4D02-9572-1671-6543-801C47987C70}"/>
+              </a:ext>
+            </a:extLst>
+          </p:cNvPr>
+          <p:cNvSpPr txBox="1"/>
+          <p:nvPr/>
+        </p:nvSpPr>
+        <p:spPr>
+          <a:xfrm>
+            <a:off x="182880" y="4887468"/>
+            <a:ext cx="6400800" cy="230792"/>
+          </a:xfrm>
+          <a:prstGeom prst="rect">
+            <a:avLst/>
+          </a:prstGeom>
+          <a:noFill/>
+          <a:ln>
+            <a:noFill/>
+          </a:ln>
+        </p:spPr>
+        <p:txBody>
+          <a:bodyPr spcFirstLastPara="1" wrap="square" lIns="91425" tIns="45700" rIns="91425" bIns="45700" anchor="t" anchorCtr="0">
+            <a:spAutoFit/>
+          </a:bodyPr>
+          <a:lstStyle/>
+          <a:p>
+            <a:pPr lvl="0"/>
+            <a:r>
+              <a:rPr lang="en-US" sz="900" dirty="0">
+                <a:solidFill>
+                  <a:srgbClr val="FFFFFF"/>
+                </a:solidFill>
+                <a:latin typeface="Calibri"/>
+                <a:ea typeface="Calibri"/>
+                <a:cs typeface="Calibri"/>
+                <a:sym typeface="Calibri"/>
+              </a:rPr>
+              <a:t>Data Analytics and Visualization for Public Policy</a:t>
+            </a:r>
+            <a:endParaRPr dirty="0"/>
+          </a:p>
+        </p:txBody>
+      </p:sp>
     </p:spTree>
   </p:cSld>
   <p:clrMapOvr>
@@ -20604,56 +21196,6 @@
       </p:sp>
       <p:sp>
         <p:nvSpPr>
-          <p:cNvPr id="196" name="Google Shape;196;p30"/>
-          <p:cNvSpPr txBox="1"/>
-          <p:nvPr/>
-        </p:nvSpPr>
-        <p:spPr>
-          <a:xfrm>
-            <a:off x="182880" y="4887468"/>
-            <a:ext cx="6400800" cy="256032"/>
-          </a:xfrm>
-          <a:prstGeom prst="rect">
-            <a:avLst/>
-          </a:prstGeom>
-          <a:noFill/>
-          <a:ln>
-            <a:noFill/>
-          </a:ln>
-        </p:spPr>
-        <p:txBody>
-          <a:bodyPr spcFirstLastPara="1" wrap="square" lIns="91425" tIns="45700" rIns="91425" bIns="45700" anchor="t" anchorCtr="0">
-            <a:spAutoFit/>
-          </a:bodyPr>
-          <a:lstStyle/>
-          <a:p>
-            <a:pPr marL="0" marR="0" lvl="0" indent="0" algn="l" rtl="0">
-              <a:spcBef>
-                <a:spcPts val="0"/>
-              </a:spcBef>
-              <a:spcAft>
-                <a:spcPts val="0"/>
-              </a:spcAft>
-              <a:buNone/>
-            </a:pPr>
-            <a:r>
-              <a:rPr lang="en" sz="900" b="0" i="0" u="none" strike="noStrike" cap="none">
-                <a:solidFill>
-                  <a:srgbClr val="FFFFFF"/>
-                </a:solidFill>
-                <a:latin typeface="Calibri"/>
-                <a:ea typeface="Calibri"/>
-                <a:cs typeface="Calibri"/>
-                <a:sym typeface="Calibri"/>
-              </a:rPr>
-              <a:t>Oligarchic Versus Democratic Societies</a:t>
-            </a:r>
-            <a:endParaRPr/>
-          </a:p>
-        </p:txBody>
-      </p:sp>
-      <p:sp>
-        <p:nvSpPr>
           <p:cNvPr id="197" name="Google Shape;197;p30"/>
           <p:cNvSpPr txBox="1"/>
           <p:nvPr/>
@@ -20661,7 +21203,7 @@
         <p:spPr>
           <a:xfrm>
             <a:off x="6583680" y="4887468"/>
-            <a:ext cx="2377440" cy="256032"/>
+            <a:ext cx="2377440" cy="230792"/>
           </a:xfrm>
           <a:prstGeom prst="rect">
             <a:avLst/>
@@ -20687,7 +21229,7 @@
               <a:buNone/>
             </a:pPr>
             <a:r>
-              <a:rPr lang="en" sz="900" b="0" i="0" u="none" strike="noStrike" cap="none">
+              <a:rPr lang="en" sz="900" dirty="0">
                 <a:solidFill>
                   <a:srgbClr val="FFFFFF"/>
                 </a:solidFill>
@@ -20696,9 +21238,33 @@
                 <a:cs typeface="Calibri"/>
                 <a:sym typeface="Calibri"/>
               </a:rPr>
-              <a:t>5 / 26</a:t>
+              <a:t>6</a:t>
             </a:r>
-            <a:endParaRPr/>
+            <a:r>
+              <a:rPr lang="en" sz="900" b="0" i="0" u="none" strike="noStrike" cap="none" dirty="0">
+                <a:solidFill>
+                  <a:srgbClr val="FFFFFF"/>
+                </a:solidFill>
+                <a:latin typeface="Calibri"/>
+                <a:ea typeface="Calibri"/>
+                <a:cs typeface="Calibri"/>
+                <a:sym typeface="Calibri"/>
+              </a:rPr>
+              <a:t> / </a:t>
+            </a:r>
+            <a:r>
+              <a:rPr lang="en" sz="900" dirty="0">
+                <a:solidFill>
+                  <a:srgbClr val="FFFFFF"/>
+                </a:solidFill>
+                <a:latin typeface="Calibri"/>
+                <a:ea typeface="Calibri"/>
+                <a:cs typeface="Calibri"/>
+                <a:sym typeface="Calibri"/>
+              </a:rPr>
+              <a:t>8</a:t>
+            </a:r>
+            <a:endParaRPr dirty="0"/>
           </a:p>
         </p:txBody>
       </p:sp>
@@ -21096,6 +21662,54 @@
           </a:p>
         </p:txBody>
       </p:sp>
+      <p:sp>
+        <p:nvSpPr>
+          <p:cNvPr id="13" name="Google Shape;136;p25">
+            <a:extLst>
+              <a:ext uri="{FF2B5EF4-FFF2-40B4-BE49-F238E27FC236}">
+                <a16:creationId xmlns:a16="http://schemas.microsoft.com/office/drawing/2014/main" id="{7687B3C2-3EA4-0F85-1977-260AD35C33F6}"/>
+              </a:ext>
+            </a:extLst>
+          </p:cNvPr>
+          <p:cNvSpPr txBox="1"/>
+          <p:nvPr/>
+        </p:nvSpPr>
+        <p:spPr>
+          <a:xfrm>
+            <a:off x="182880" y="4887468"/>
+            <a:ext cx="6400800" cy="230792"/>
+          </a:xfrm>
+          <a:prstGeom prst="rect">
+            <a:avLst/>
+          </a:prstGeom>
+          <a:noFill/>
+          <a:ln>
+            <a:noFill/>
+          </a:ln>
+        </p:spPr>
+        <p:txBody>
+          <a:bodyPr spcFirstLastPara="1" wrap="square" lIns="91425" tIns="45700" rIns="91425" bIns="45700" anchor="t" anchorCtr="0">
+            <a:spAutoFit/>
+          </a:bodyPr>
+          <a:lstStyle/>
+          <a:p>
+            <a:pPr lvl="0"/>
+            <a:r>
+              <a:rPr lang="en-US" sz="900" dirty="0">
+                <a:solidFill>
+                  <a:srgbClr val="FFFFFF"/>
+                </a:solidFill>
+                <a:latin typeface="Calibri"/>
+                <a:ea typeface="Calibri"/>
+                <a:cs typeface="Calibri"/>
+                <a:sym typeface="Calibri"/>
+              </a:rPr>
+              <a:t>Data Analytics and Visualization for Public Policy</a:t>
+            </a:r>
+            <a:endParaRPr dirty="0"/>
+          </a:p>
+        </p:txBody>
+      </p:sp>
     </p:spTree>
   </p:cSld>
   <p:clrMapOvr>
@@ -21310,56 +21924,6 @@
       </p:sp>
       <p:sp>
         <p:nvSpPr>
-          <p:cNvPr id="208" name="Google Shape;208;p31"/>
-          <p:cNvSpPr txBox="1"/>
-          <p:nvPr/>
-        </p:nvSpPr>
-        <p:spPr>
-          <a:xfrm>
-            <a:off x="182880" y="4887468"/>
-            <a:ext cx="6400800" cy="256032"/>
-          </a:xfrm>
-          <a:prstGeom prst="rect">
-            <a:avLst/>
-          </a:prstGeom>
-          <a:noFill/>
-          <a:ln>
-            <a:noFill/>
-          </a:ln>
-        </p:spPr>
-        <p:txBody>
-          <a:bodyPr spcFirstLastPara="1" wrap="square" lIns="91425" tIns="45700" rIns="91425" bIns="45700" anchor="t" anchorCtr="0">
-            <a:spAutoFit/>
-          </a:bodyPr>
-          <a:lstStyle/>
-          <a:p>
-            <a:pPr marL="0" marR="0" lvl="0" indent="0" algn="l" rtl="0">
-              <a:spcBef>
-                <a:spcPts val="0"/>
-              </a:spcBef>
-              <a:spcAft>
-                <a:spcPts val="0"/>
-              </a:spcAft>
-              <a:buNone/>
-            </a:pPr>
-            <a:r>
-              <a:rPr lang="en" sz="900" b="0" i="0" u="none" strike="noStrike" cap="none">
-                <a:solidFill>
-                  <a:srgbClr val="FFFFFF"/>
-                </a:solidFill>
-                <a:latin typeface="Calibri"/>
-                <a:ea typeface="Calibri"/>
-                <a:cs typeface="Calibri"/>
-                <a:sym typeface="Calibri"/>
-              </a:rPr>
-              <a:t>Oligarchic Versus Democratic Societies</a:t>
-            </a:r>
-            <a:endParaRPr/>
-          </a:p>
-        </p:txBody>
-      </p:sp>
-      <p:sp>
-        <p:nvSpPr>
           <p:cNvPr id="209" name="Google Shape;209;p31"/>
           <p:cNvSpPr txBox="1"/>
           <p:nvPr/>
@@ -21367,7 +21931,7 @@
         <p:spPr>
           <a:xfrm>
             <a:off x="6583680" y="4887468"/>
-            <a:ext cx="2377440" cy="256032"/>
+            <a:ext cx="2377440" cy="230792"/>
           </a:xfrm>
           <a:prstGeom prst="rect">
             <a:avLst/>
@@ -21393,7 +21957,7 @@
               <a:buNone/>
             </a:pPr>
             <a:r>
-              <a:rPr lang="en" sz="900" b="0" i="0" u="none" strike="noStrike" cap="none">
+              <a:rPr lang="en" sz="900" b="0" i="0" u="none" strike="noStrike" cap="none" dirty="0">
                 <a:solidFill>
                   <a:srgbClr val="FFFFFF"/>
                 </a:solidFill>
@@ -21402,9 +21966,9 @@
                 <a:cs typeface="Calibri"/>
                 <a:sym typeface="Calibri"/>
               </a:rPr>
-              <a:t>22 / 26</a:t>
+              <a:t>7/ 8</a:t>
             </a:r>
-            <a:endParaRPr/>
+            <a:endParaRPr dirty="0"/>
           </a:p>
         </p:txBody>
       </p:sp>
@@ -23383,6 +23947,54 @@
           </a:prstGeom>
         </p:spPr>
       </p:pic>
+      <p:sp>
+        <p:nvSpPr>
+          <p:cNvPr id="27" name="Google Shape;136;p25">
+            <a:extLst>
+              <a:ext uri="{FF2B5EF4-FFF2-40B4-BE49-F238E27FC236}">
+                <a16:creationId xmlns:a16="http://schemas.microsoft.com/office/drawing/2014/main" id="{D3A8FD3E-4B60-21FD-3AF1-7A5ABE67D81F}"/>
+              </a:ext>
+            </a:extLst>
+          </p:cNvPr>
+          <p:cNvSpPr txBox="1"/>
+          <p:nvPr/>
+        </p:nvSpPr>
+        <p:spPr>
+          <a:xfrm>
+            <a:off x="182880" y="4887468"/>
+            <a:ext cx="6400800" cy="230792"/>
+          </a:xfrm>
+          <a:prstGeom prst="rect">
+            <a:avLst/>
+          </a:prstGeom>
+          <a:noFill/>
+          <a:ln>
+            <a:noFill/>
+          </a:ln>
+        </p:spPr>
+        <p:txBody>
+          <a:bodyPr spcFirstLastPara="1" wrap="square" lIns="91425" tIns="45700" rIns="91425" bIns="45700" anchor="t" anchorCtr="0">
+            <a:spAutoFit/>
+          </a:bodyPr>
+          <a:lstStyle/>
+          <a:p>
+            <a:pPr lvl="0"/>
+            <a:r>
+              <a:rPr lang="en-US" sz="900" dirty="0">
+                <a:solidFill>
+                  <a:srgbClr val="FFFFFF"/>
+                </a:solidFill>
+                <a:latin typeface="Calibri"/>
+                <a:ea typeface="Calibri"/>
+                <a:cs typeface="Calibri"/>
+                <a:sym typeface="Calibri"/>
+              </a:rPr>
+              <a:t>Data Analytics and Visualization for Public Policy</a:t>
+            </a:r>
+            <a:endParaRPr dirty="0"/>
+          </a:p>
+        </p:txBody>
+      </p:sp>
     </p:spTree>
   </p:cSld>
   <p:clrMapOvr>
@@ -23609,56 +24221,6 @@
       </p:sp>
       <p:sp>
         <p:nvSpPr>
-          <p:cNvPr id="219" name="Google Shape;219;p32"/>
-          <p:cNvSpPr txBox="1"/>
-          <p:nvPr/>
-        </p:nvSpPr>
-        <p:spPr>
-          <a:xfrm>
-            <a:off x="182880" y="4887468"/>
-            <a:ext cx="6400800" cy="256032"/>
-          </a:xfrm>
-          <a:prstGeom prst="rect">
-            <a:avLst/>
-          </a:prstGeom>
-          <a:noFill/>
-          <a:ln>
-            <a:noFill/>
-          </a:ln>
-        </p:spPr>
-        <p:txBody>
-          <a:bodyPr spcFirstLastPara="1" wrap="square" lIns="91425" tIns="45700" rIns="91425" bIns="45700" anchor="t" anchorCtr="0">
-            <a:spAutoFit/>
-          </a:bodyPr>
-          <a:lstStyle/>
-          <a:p>
-            <a:pPr marL="0" marR="0" lvl="0" indent="0" algn="l" rtl="0">
-              <a:spcBef>
-                <a:spcPts val="0"/>
-              </a:spcBef>
-              <a:spcAft>
-                <a:spcPts val="0"/>
-              </a:spcAft>
-              <a:buNone/>
-            </a:pPr>
-            <a:r>
-              <a:rPr lang="en" sz="900" b="0" i="0" u="none" strike="noStrike" cap="none">
-                <a:solidFill>
-                  <a:srgbClr val="FFFFFF"/>
-                </a:solidFill>
-                <a:latin typeface="Calibri"/>
-                <a:ea typeface="Calibri"/>
-                <a:cs typeface="Calibri"/>
-                <a:sym typeface="Calibri"/>
-              </a:rPr>
-              <a:t>Oligarchic Versus Democratic Societies</a:t>
-            </a:r>
-            <a:endParaRPr/>
-          </a:p>
-        </p:txBody>
-      </p:sp>
-      <p:sp>
-        <p:nvSpPr>
           <p:cNvPr id="220" name="Google Shape;220;p32"/>
           <p:cNvSpPr txBox="1"/>
           <p:nvPr/>
@@ -23666,7 +24228,7 @@
         <p:spPr>
           <a:xfrm>
             <a:off x="6583680" y="4887468"/>
-            <a:ext cx="2377440" cy="256032"/>
+            <a:ext cx="2377440" cy="230792"/>
           </a:xfrm>
           <a:prstGeom prst="rect">
             <a:avLst/>
@@ -23692,7 +24254,7 @@
               <a:buNone/>
             </a:pPr>
             <a:r>
-              <a:rPr lang="en" sz="900" b="0" i="0" u="none" strike="noStrike" cap="none">
+              <a:rPr lang="en" sz="900" dirty="0">
                 <a:solidFill>
                   <a:srgbClr val="FFFFFF"/>
                 </a:solidFill>
@@ -23701,9 +24263,33 @@
                 <a:cs typeface="Calibri"/>
                 <a:sym typeface="Calibri"/>
               </a:rPr>
-              <a:t>26 / 26</a:t>
+              <a:t>8</a:t>
             </a:r>
-            <a:endParaRPr/>
+            <a:r>
+              <a:rPr lang="en" sz="900" b="0" i="0" u="none" strike="noStrike" cap="none" dirty="0">
+                <a:solidFill>
+                  <a:srgbClr val="FFFFFF"/>
+                </a:solidFill>
+                <a:latin typeface="Calibri"/>
+                <a:ea typeface="Calibri"/>
+                <a:cs typeface="Calibri"/>
+                <a:sym typeface="Calibri"/>
+              </a:rPr>
+              <a:t> / </a:t>
+            </a:r>
+            <a:r>
+              <a:rPr lang="en" sz="900" dirty="0">
+                <a:solidFill>
+                  <a:srgbClr val="FFFFFF"/>
+                </a:solidFill>
+                <a:latin typeface="Calibri"/>
+                <a:ea typeface="Calibri"/>
+                <a:cs typeface="Calibri"/>
+                <a:sym typeface="Calibri"/>
+              </a:rPr>
+              <a:t>8</a:t>
+            </a:r>
+            <a:endParaRPr dirty="0"/>
           </a:p>
         </p:txBody>
       </p:sp>
@@ -24391,9 +24977,57 @@
               <a:rPr lang="en-US" altLang="zh-CN" dirty="0">
                 <a:hlinkClick r:id="rId6"/>
               </a:rPr>
-              <a:t>http://localhost:8504/</a:t>
+              <a:t>http://localhost:/</a:t>
             </a:r>
             <a:endParaRPr lang="en-US" altLang="zh-CN" dirty="0"/>
+          </a:p>
+        </p:txBody>
+      </p:sp>
+      <p:sp>
+        <p:nvSpPr>
+          <p:cNvPr id="29" name="Google Shape;136;p25">
+            <a:extLst>
+              <a:ext uri="{FF2B5EF4-FFF2-40B4-BE49-F238E27FC236}">
+                <a16:creationId xmlns:a16="http://schemas.microsoft.com/office/drawing/2014/main" id="{B7EC41A6-16C6-6FE7-B215-E8007D8D1914}"/>
+              </a:ext>
+            </a:extLst>
+          </p:cNvPr>
+          <p:cNvSpPr txBox="1"/>
+          <p:nvPr/>
+        </p:nvSpPr>
+        <p:spPr>
+          <a:xfrm>
+            <a:off x="182880" y="4887468"/>
+            <a:ext cx="6400800" cy="230792"/>
+          </a:xfrm>
+          <a:prstGeom prst="rect">
+            <a:avLst/>
+          </a:prstGeom>
+          <a:noFill/>
+          <a:ln>
+            <a:noFill/>
+          </a:ln>
+        </p:spPr>
+        <p:txBody>
+          <a:bodyPr spcFirstLastPara="1" wrap="square" lIns="91425" tIns="45700" rIns="91425" bIns="45700" anchor="t" anchorCtr="0">
+            <a:spAutoFit/>
+          </a:bodyPr>
+          <a:lstStyle/>
+          <a:p>
+            <a:pPr lvl="0"/>
+            <a:r>
+              <a:rPr lang="en-US" sz="900" dirty="0">
+                <a:solidFill>
+                  <a:srgbClr val="FFFFFF"/>
+                </a:solidFill>
+                <a:latin typeface="Calibri"/>
+                <a:ea typeface="Calibri"/>
+                <a:cs typeface="Calibri"/>
+                <a:sym typeface="Calibri"/>
+              </a:rPr>
+              <a:t>Data Analytics and Visualization for Public Policy</a:t>
+            </a:r>
+            <a:endParaRPr dirty="0"/>
           </a:p>
         </p:txBody>
       </p:sp>
